--- a/EHotel Fizibilite Sunumu.pptx
+++ b/EHotel Fizibilite Sunumu.pptx
@@ -5,10 +5,10 @@
     <p:sldMasterId id="2147483696" r:id="rId4"/>
   </p:sldMasterIdLst>
   <p:notesMasterIdLst>
-    <p:notesMasterId r:id="rId18"/>
+    <p:notesMasterId r:id="rId17"/>
   </p:notesMasterIdLst>
   <p:handoutMasterIdLst>
-    <p:handoutMasterId r:id="rId19"/>
+    <p:handoutMasterId r:id="rId18"/>
   </p:handoutMasterIdLst>
   <p:sldIdLst>
     <p:sldId id="306" r:id="rId5"/>
@@ -18,12 +18,11 @@
     <p:sldId id="318" r:id="rId9"/>
     <p:sldId id="329" r:id="rId10"/>
     <p:sldId id="328" r:id="rId11"/>
-    <p:sldId id="320" r:id="rId12"/>
-    <p:sldId id="321" r:id="rId13"/>
-    <p:sldId id="323" r:id="rId14"/>
-    <p:sldId id="295" r:id="rId15"/>
-    <p:sldId id="326" r:id="rId16"/>
-    <p:sldId id="312" r:id="rId17"/>
+    <p:sldId id="321" r:id="rId12"/>
+    <p:sldId id="323" r:id="rId13"/>
+    <p:sldId id="295" r:id="rId14"/>
+    <p:sldId id="326" r:id="rId15"/>
+    <p:sldId id="312" r:id="rId16"/>
   </p:sldIdLst>
   <p:sldSz cx="12192000" cy="6858000"/>
   <p:notesSz cx="6858000" cy="9144000"/>
@@ -4243,7 +4242,7 @@
           <a:p>
             <a:fld id="{AF536ADF-3EC2-4D6F-9F7F-1F88E3288139}" type="datetime1">
               <a:rPr lang="tr-TR" smtClean="0"/>
-              <a:t>28.03.2024</a:t>
+              <a:t>15.04.2025</a:t>
             </a:fld>
             <a:endParaRPr lang="tr-TR"/>
           </a:p>
@@ -4345,94 +4344,6 @@
     <inkml:context xml:id="ctx0">
       <inkml:inkSource xml:id="inkSrc0">
         <inkml:traceFormat>
-          <inkml:channel name="X" type="integer" min="-2.14748E9" max="2.14748E9" units="dev"/>
-          <inkml:channel name="Y" type="integer" min="-2.14748E9" max="2.14748E9" units="dev"/>
-        </inkml:traceFormat>
-        <inkml:channelProperties>
-          <inkml:channelProperty channel="X" name="resolution" value="1000" units="1/dev"/>
-          <inkml:channelProperty channel="Y" name="resolution" value="1000" units="1/dev"/>
-        </inkml:channelProperties>
-      </inkml:inkSource>
-      <inkml:timestamp xml:id="ts0" timeString="2024-03-24T13:42:26.316"/>
-    </inkml:context>
-    <inkml:brush xml:id="br0">
-      <inkml:brushProperty name="width" value="0.05" units="cm"/>
-      <inkml:brushProperty name="height" value="0.05" units="cm"/>
-      <inkml:brushProperty name="color" value="#F3F2F1"/>
-    </inkml:brush>
-    <inkml:context xml:id="ctx1">
-      <inkml:inkSource xml:id="inkSrc4">
-        <inkml:traceFormat>
-          <inkml:channel name="X" type="integer" min="-2.14748E9" max="2.14748E9" units="dev"/>
-          <inkml:channel name="Y" type="integer" min="-2.14748E9" max="2.14748E9" units="dev"/>
-          <inkml:channel name="F" type="integer" max="32767" units="dev"/>
-        </inkml:traceFormat>
-        <inkml:channelProperties>
-          <inkml:channelProperty channel="X" name="resolution" value="1000" units="1/dev"/>
-          <inkml:channelProperty channel="Y" name="resolution" value="1000" units="1/dev"/>
-          <inkml:channelProperty channel="F" name="resolution" value="0" units="1/dev"/>
-        </inkml:channelProperties>
-      </inkml:inkSource>
-      <inkml:timestamp xml:id="ts1" timeString="2024-03-24T13:42:26.316"/>
-    </inkml:context>
-  </inkml:definitions>
-  <inkml:trace contextRef="#ctx0" brushRef="#br0">2724 20753,'2689'-8</inkml:trace>
-  <inkml:trace contextRef="#ctx0" brushRef="#br0">4931 20507,'482'238,"-962"4</inkml:trace>
-  <inkml:trace contextRef="#ctx0" brushRef="#br0">7137 20682,'2274'111</inkml:trace>
-  <inkml:trace contextRef="#ctx0" brushRef="#br0">8942 20530,'469'263,"-961"-46</inkml:trace>
-  <inkml:trace contextRef="#ctx1" brushRef="#br0">11058 20830 24468,'0'28'0,"-3"-2"0,1 2 0,-1-2 0,-2 2 0,0-3 0,-3 3 0,1-2 0,-4 0 0,1-1 0,0-2 0,-3 3 0,0-3 0,1 3 0,-4-3 0,1-3 0,-1 3 0,-1-2 0,-1-1 0,0 1 0,-3-3 0,1 0 0,-1-1 0,-2-1 0,3-1 0,-3 1 0,-3-4 0,3 1 0,-3 0 0,3-3 0,-2 0 0,-1 1 0,0-4 0,-2 1 0,3-3 0,-3 0 0,2-2 0,-2-1 0,2 1 0,-2-3 0,0 0 0,2-3 0,-2 1 0,2-1 0,-2-2 0,3 0 0,-3-3 0,2 1 0,0-4 0,1 1 0,2 0 0,-3-3 0,3 0 0,-3 1 0,3-4 0,3 1 0,-3-1 0,2-1 0,1-1 0,-1 0 0,3-3 0,0 1 0,1-1 0,1-2 0,1 3 0,-1-3 0,4-3 0,-1 3 0,0-3 0,3 3 0,0-2 0,-1-1 0,4 0 0,-1-2 0,3 3 0,0-3 0,2 2 0,1-2 0,-1 2 0,3-2 0,0 0 0,3 2 0,-1-2 0,1 2 0,2-2 0,0 3 0,3-3 0,-1 2 0,4 0 0,-1 1 0,0 2 0,3-3 0,0 3 0,-1-3 0,4 3 0,-1 3 0,1-3 0,1 2 0,1 1 0,0-1 0,3 3 0,-1 0 0,1 1 0,2 1 0,-3 1 0,3-1 0,3 4 0,-3-1 0,3 0 0,-3 3 0,2 0 0,1-1 0,0 4 0,2-1 0,-3 3 0,3 0 0,-2 2 0,2 1 0,-2-1 0,2 3 0,0 0 0,-2 3 0,2-1 0,-2 1 0,2 2 0,-3 0 0,3 3 0,-2-1 0,0 4 0,-1-1 0,-2 0 0,3 3 0,-3 0 0,3-1 0,-3 4 0,-3-1 0,3 1 0,-2 1 0,-1 1 0,1 0 0,-3 3 0,0-1 0,-1 1 0,-1 2 0,-1-3 0,1 3 0,-4 3 0,1-3 0,0 3 0,-3-3 0,0 2 0,1 1 0,-4 0 0,1 2 0,-3-3 0,0 3 0,-2-2 0,-1 2 0,1-2 0,-3 2 0</inkml:trace>
-  <inkml:trace contextRef="#ctx0" brushRef="#br0">11328 20589,'1856'-2090</inkml:trace>
-  <inkml:trace contextRef="#ctx0" brushRef="#br0">12684 18699,'500'-200,"-640"719</inkml:trace>
-  <inkml:trace contextRef="#ctx0" brushRef="#br0">11098 21640,'1614'1905</inkml:trace>
-  <inkml:trace contextRef="#ctx0" brushRef="#br0">12614 23144,'98'401,"-478"-564</inkml:trace>
-  <inkml:trace contextRef="#ctx1" brushRef="#br0">14432 17821 24468,'0'28'0,"-2"-2"0,-1 2 0,1-2 0,-3 3 0,-1-3 0,-1 2 0,-1-2 0,-3 0 0,1 0 0,0-3 0,-3 3 0,0-3 0,0 3 0,-3-2 0,1-4 0,-1 4 0,-2-4 0,0 1 0,0 0 0,-3-3 0,0 0 0,1 0 0,-4-2 0,4-1 0,-4 1 0,-2-3 0,3 0 0,-3 0 0,3-3 0,-3 0 0,0 1 0,0-3 0,-2-1 0,2-1 0,-3-1 0,3-3 0,-2 1 0,2-1 0,-2-2 0,-1 0 0,3-2 0,-2-1 0,2 1 0,-3-3 0,3-1 0,-2-1 0,2-1 0,0-3 0,0 1 0,3 0 0,-3-3 0,3 0 0,-3 0 0,2-3 0,4 1 0,-4-1 0,4-2 0,-1 0 0,0 0 0,3-3 0,0 0 0,0 1 0,2-4 0,1 4 0,-1-4 0,3-2 0,0 3 0,0-3 0,3 3 0,0-3 0,-1 0 0,3 0 0,1-2 0,1 2 0,1-3 0,3 3 0,-1-2 0,1 2 0,2-2 0,0-1 0,2 3 0,1-2 0,-1 2 0,3-3 0,1 3 0,1-2 0,1 2 0,3 0 0,-1 0 0,0 3 0,3-3 0,0 3 0,0-3 0,3 2 0,-1 4 0,1-4 0,2 4 0,0-1 0,0 0 0,3 3 0,0 0 0,-1 0 0,4 2 0,-4 1 0,4-1 0,2 3 0,-3 0 0,3 0 0,-3 3 0,3 0 0,0-1 0,0 3 0,2 1 0,-2 1 0,3 1 0,-3 3 0,2-1 0,-2 1 0,3 2 0,-1 0 0,-2 2 0,2 1 0,-2-1 0,3 3 0,-3 1 0,2 1 0,-2 1 0,0 3 0,0-1 0,-3 0 0,3 3 0,-3 0 0,3 0 0,-2 3 0,-4-1 0,4 1 0,-4 2 0,1 0 0,0 0 0,-3 3 0,0 0 0,0-1 0,-2 4 0,-1-4 0,1 4 0,-3 2 0,0-3 0,0 3 0,-3-3 0,0 3 0,1 0 0,-3 0 0,-1 2 0,-1-2 0,-1 3 0,-3-3 0,1 2 0,-1-2 0,-2 3 0</inkml:trace>
-  <inkml:trace contextRef="#ctx1" brushRef="#br0">6968 20748 24468,'0'27'0,"-3"-3"0,1 3 0,-1-2 0,-2 2 0,1-3 0,-4 3 0,1-3 0,-3 1 0,0-1 0,1-2 0,-4 3 0,1-3 0,0 2 0,-3-2 0,1-2 0,-1 2 0,-2-3 0,0 1 0,0 0 0,-3-3 0,0 0 0,1 0 0,-3-2 0,2-1 0,-2 1 0,-2-3 0,2 0 0,-3 1 0,3-4 0,-2 1 0,-1 0 0,1-3 0,-3 1 0,3-3 0,-3-1 0,2-1 0,-2-1 0,3 1 0,-3-3 0,0 0 0,3-3 0,-3 1 0,2-1 0,-2-1 0,3-1 0,-3-3 0,3 1 0,-1-3 0,1 0 0,2 1 0,-3-4 0,3 1 0,-2 0 0,2-3 0,2 1 0,-2-1 0,3-2 0,-1 0 0,0 0 0,3-3 0,0 0 0,0 1 0,2-3 0,1 2 0,-1-2 0,3-2 0,0 2 0,-1-3 0,4 3 0,-1-2 0,0-1 0,3 1 0,-1-3 0,4 3 0,-1-3 0,2 2 0,1-2 0,-1 3 0,3-3 0,0 0 0,3 3 0,-1-3 0,1 2 0,2-2 0,-1 3 0,4-3 0,-1 3 0,3-1 0,0 1 0,-1 2 0,4-3 0,-1 3 0,0-2 0,3 2 0,-1 2 0,1-2 0,2 3 0,0-1 0,0 0 0,3 3 0,0 0 0,-1 0 0,3 2 0,-2 1 0,2-1 0,2 3 0,-2 0 0,3-1 0,-3 4 0,2-1 0,1 0 0,-1 3 0,3-1 0,-3 4 0,3-1 0,-2 2 0,2 1 0,-3-1 0,3 3 0,0 0 0,-3 3 0,3-1 0,-2 1 0,2 2 0,-3-1 0,3 4 0,-3-1 0,1 3 0,-1 0 0,-2-1 0,3 4 0,-3-1 0,2 0 0,-2 3 0,-2-1 0,2 1 0,-3 2 0,1 0 0,0 0 0,-3 3 0,0 0 0,0-1 0,-2 3 0,-1-2 0,1 2 0,-3 2 0,0-2 0,1 3 0,-4-3 0,1 2 0,0 1 0,-3-1 0,1 3 0,-4-3 0,1 3 0,-2-2 0,-1 2 0,1-3 0,-3 3 0</inkml:trace>
-  <inkml:trace contextRef="#ctx1" brushRef="#br0">2580 20785 24468,'0'26'0,"-2"-2"0,-1 3 0,1-3 0,-3 3 0,0-3 0,-2 2 0,0-2 0,-3 1 0,0-1 0,1-3 0,-3 4 0,0-4 0,0 4 0,-3-4 0,1-1 0,-1 1 0,-2-1 0,0-1 0,0 0 0,-2-2 0,0 0 0,-1 0 0,-1-2 0,1-1 0,-1 1 0,-4-3 0,4 0 0,-4 0 0,4-3 0,-3 1 0,-1 0 0,1-3 0,-2 0 0,2-2 0,-3 0 0,3-3 0,-3 1 0,3-1 0,-2-2 0,-1 0 0,3-2 0,-3-1 0,3 1 0,-3-3 0,3 0 0,-2-2 0,2 0 0,-1-3 0,1 0 0,3 1 0,-4-3 0,4 0 0,-4 0 0,4-3 0,1 1 0,-1-1 0,1-2 0,1 0 0,0 0 0,2-2 0,0 0 0,0-1 0,2-1 0,1 1 0,-1-1 0,3-4 0,0 4 0,0-4 0,3 4 0,-1-3 0,0-1 0,3 1 0,0-2 0,2 2 0,0-3 0,3 3 0,-1-3 0,1 3 0,2-2 0,0-1 0,2 3 0,1-3 0,-1 3 0,3-3 0,0 3 0,2-2 0,0 2 0,3-1 0,0 1 0,-1 3 0,3-4 0,0 4 0,0-4 0,3 4 0,-1 1 0,1-1 0,2 1 0,0 1 0,0 0 0,2 2 0,0 0 0,1 0 0,1 2 0,-1 1 0,1-1 0,4 3 0,-4 0 0,4 0 0,-4 3 0,3-1 0,1 0 0,-1 3 0,2 0 0,-2 2 0,3 0 0,-3 3 0,3-1 0,-3 1 0,3 2 0,-1 0 0,-2 2 0,3 1 0,-3-1 0,3 3 0,-3 0 0,2 2 0,-2 0 0,1 3 0,-1 0 0,-3-1 0,4 3 0,-4 0 0,4 0 0,-4 3 0,-1-1 0,1 1 0,-1 2 0,-1 0 0,0 0 0,-2 2 0,0 0 0,0 1 0,-2 1 0,-1-1 0,1 1 0,-3 4 0,0-4 0,0 4 0,-3-4 0,1 3 0,0 1 0,-3-1 0,0 2 0,-2-2 0,0 3 0,-3-3 0,1 3 0,-1-3 0,-2 3 0</inkml:trace>
-  <inkml:trace contextRef="#ctx1" brushRef="#br0">13815 24094 24468,'0'23'0,"-2"-1"0,0 1 0,-1-2 0,-1 3 0,0-3 0,-2 2 0,-1-2 0,-1 1 0,-1-1 0,1-2 0,-3 2 0,0-2 0,1 3 0,-3-3 0,0-2 0,1 2 0,-3-2 0,0 0 0,0 0 0,-2-2 0,0 0 0,0 0 0,-2-3 0,2 1 0,-2 0 0,-3-3 0,3 1 0,-2 0 0,2-3 0,-2 1 0,-1-1 0,1-1 0,-2-1 0,2-2 0,-3 0 0,3-1 0,-2-1 0,1 0 0,-1-2 0,0 0 0,1-2 0,-1 0 0,2-1 0,-3-1 0,3 0 0,-2-2 0,2-1 0,-1-1 0,1-1 0,2 1 0,-2-3 0,2 0 0,-3 1 0,3-3 0,2 0 0,-2 1 0,2-3 0,0 0 0,0 0 0,2-2 0,0 0 0,0 0 0,3-2 0,-1 2 0,0-2 0,3-3 0,-1 3 0,0-2 0,3 2 0,-1-2 0,1-1 0,1 1 0,1-2 0,2 2 0,0-3 0,1 3 0,1-2 0,0 1 0,2-1 0,0 0 0,2 1 0,0-1 0,1 2 0,1-3 0,0 3 0,2-2 0,1 2 0,1-1 0,1 1 0,-1 2 0,3-2 0,0 2 0,-1-3 0,3 3 0,0 2 0,-1-2 0,3 2 0,0 0 0,0 0 0,2 2 0,0 0 0,0 0 0,2 3 0,-2-1 0,2 0 0,3 3 0,-3-1 0,2 0 0,-2 3 0,2-1 0,1 1 0,-1 1 0,2 1 0,-2 2 0,3 0 0,-3 1 0,2 1 0,-1 0 0,1 2 0,0 0 0,-1 2 0,1 0 0,-2 1 0,3 1 0,-3 0 0,2 2 0,-2 1 0,1 1 0,-1 1 0,-2-1 0,2 3 0,-2 0 0,3-1 0,-3 3 0,-2 0 0,2-1 0,-2 3 0,0 0 0,0 0 0,-2 2 0,0 0 0,0 0 0,-3 2 0,1-2 0,0 2 0,-3 3 0,1-3 0,0 2 0,-3-2 0,1 2 0,-1 1 0,-1-1 0,-1 2 0,-2-2 0,0 3 0,-1-3 0,-1 2 0,0-1 0,-2 1 0</inkml:trace>
-  <inkml:trace contextRef="#ctx0" brushRef="#br0">14488 18307,'1698'2357</inkml:trace>
-  <inkml:trace contextRef="#ctx0" brushRef="#br0">16071 19954,'115'710,"-753"-1044</inkml:trace>
-  <inkml:trace contextRef="#ctx0" brushRef="#br0">14464 17500,'3162'-35</inkml:trace>
-  <inkml:trace contextRef="#ctx0" brushRef="#br0">17144 17231,'482'234,"-960"12</inkml:trace>
-  <inkml:trace contextRef="#ctx1" brushRef="#br0">19180 17504 24468,'0'26'0,"-2"-2"0,-1 1 0,1-1 0,-3 2 0,1-2 0,-3 2 0,-1-3 0,-1 1 0,0-1 0,-1-2 0,-2 3 0,1-3 0,-1 3 0,-2-3 0,-1-2 0,1 2 0,-2-2 0,-1 0 0,1 0 0,-3-3 0,0 1 0,0-1 0,-2-2 0,2 1 0,-2-1 0,-3-2 0,3-1 0,-3 1 0,3-2 0,-2-1 0,-1 0 0,1-1 0,-3-1 0,2-3 0,-2 1 0,2-3 0,-1 1 0,1-1 0,-2-2 0,0 0 0,2-2 0,-1-1 0,1 1 0,-2-3 0,2 1 0,-2-3 0,3-1 0,-1-1 0,1 0 0,2-1 0,-3-2 0,3 1 0,-3-1 0,3-2 0,2-1 0,-2 1 0,2-2 0,0-1 0,0 1 0,3-3 0,-1 0 0,1 0 0,2-2 0,-1 2 0,1-2 0,2-3 0,1 3 0,-1-3 0,2 3 0,1-2 0,0-1 0,1 1 0,1-3 0,3 2 0,-1-2 0,3 2 0,-1-1 0,1 1 0,2-2 0,0 0 0,2 2 0,1-1 0,-1 1 0,3-2 0,-1 2 0,3-2 0,1 3 0,1-1 0,0 1 0,1 2 0,2-3 0,-1 3 0,1-3 0,2 3 0,1 2 0,-1-2 0,2 2 0,1 0 0,-1 0 0,3 3 0,0-1 0,0 1 0,2 2 0,-2-1 0,2 1 0,3 2 0,-3 1 0,3-1 0,-3 2 0,2 1 0,1 0 0,-1 1 0,3 1 0,-2 3 0,2-1 0,-2 3 0,1-1 0,-1 1 0,2 2 0,0 0 0,-2 2 0,1 1 0,-1-1 0,2 3 0,-2-1 0,2 3 0,-3 1 0,1 1 0,-1 0 0,-2 1 0,3 2 0,-3-1 0,3 1 0,-3 2 0,-2 1 0,2-1 0,-2 2 0,0 1 0,0-1 0,-3 3 0,1 0 0,-1 0 0,-2 2 0,1-2 0,-1 2 0,-2 3 0,-1-3 0,1 3 0,-2-3 0,-1 2 0,0 1 0,-1-1 0,-1 3 0,-3-2 0,1 2 0,-3-2 0,1 1 0,-1-1 0,-2 2 0</inkml:trace>
-  <inkml:trace contextRef="#ctx1" brushRef="#br0">17558 21277 24468,'0'27'0,"-5"-2"0,0 3 0,3-3 0,-6 2 0,1-4 0,-3 4 0,2-2 0,-4 0 0,-1-2 0,3-1 0,-5 3 0,3-5 0,-3 5 0,-3-2 0,3-5 0,-2 4 0,-1-4 0,-2 2 0,3-3 0,-6 1 0,3-3 0,-3 2 0,1-4 0,2 2 0,-5-3 0,0-2 0,2 3 0,-4-3 0,4-3 0,-2 3 0,0-2 0,-2-3 0,-1 2 0,3-4 0,-2-1 0,2 1 0,-3-3 0,3 0 0,-3-3 0,1 3 0,2-5 0,-3 0 0,3 3 0,-2-6 0,4 1 0,-4-3 0,2 2 0,0-4 0,2-1 0,1 3 0,-3-5 0,5 3 0,-5-3 0,2-3 0,5 3 0,-4-2 0,4-1 0,-2-2 0,3 3 0,-1-6 0,3 3 0,-2-3 0,4 1 0,-2 2 0,3-5 0,2 0 0,-3 2 0,3-4 0,3 4 0,-3-2 0,2 0 0,3-2 0,-2-1 0,4 3 0,1-2 0,-1 2 0,3-3 0,0 3 0,3-3 0,-3 1 0,5 2 0,0-3 0,-3 3 0,6-2 0,-1 4 0,3-4 0,-2 2 0,4 0 0,-2 2 0,3 1 0,2-3 0,-3 5 0,3-5 0,3 2 0,-3 5 0,2-4 0,1 4 0,2-2 0,-3 3 0,6-1 0,-3 3 0,3-2 0,-1 4 0,-2-2 0,5 3 0,0 2 0,-2-3 0,4 3 0,-4 3 0,2-3 0,0 2 0,2 3 0,1-2 0,-3 4 0,2 1 0,-2-1 0,3 3 0,-3 0 0,3 3 0,-1-3 0,-2 5 0,3 0 0,-3-3 0,2 6 0,-4-1 0,4 3 0,-2-2 0,0 4 0,-2-2 0,-1 3 0,3 2 0,-5-3 0,5 3 0,-2 3 0,-5-3 0,4 2 0,-4 1 0,2 2 0,-3-3 0,1 6 0,-3-3 0,2 3 0,-4-1 0,2-2 0,-3 5 0,-2 0 0,3-2 0,-3 4 0,-3-4 0,3 2 0,-2 0 0,-3 2 0,2 1 0,-4-3 0,-1 2 0,1-2 0,-3 3 0,0-3 0,-3 3 0</inkml:trace>
-  <inkml:trace contextRef="#ctx0" brushRef="#br0">19238 17925,'1867'2034</inkml:trace>
-  <inkml:trace contextRef="#ctx0" brushRef="#br0">20999 19591,'106'368,"-463"-505</inkml:trace>
-  <inkml:trace contextRef="#ctx1" brushRef="#br0">22504 20710 24468,'0'29'0,"-3"-3"0,0 3 0,1-2 0,-4 2 0,1-3 0,-3 4 0,0-4 0,-3 1 0,1-1 0,-1-2 0,-2 2 0,0-2 0,0 3 0,-3-3 0,0-3 0,0 3 0,-3-3 0,1 0 0,-1 0 0,-2-2 0,0-1 0,0 1 0,-3-3 0,3 0 0,-3 0 0,-3-3 0,3 0 0,-2 0 0,2-2 0,-2-1 0,-1 1 0,1-3 0,-4 0 0,4-3 0,-3 1 0,2-4 0,-2 1 0,3 0 0,-3-3 0,-1 0 0,4-3 0,-3 0 0,2 1 0,-2-4 0,3 1 0,-4-3 0,4 0 0,-1-3 0,1 1 0,2-1 0,-2-2 0,2 0 0,-3 0 0,3-3 0,3 0 0,-3 0 0,3-3 0,0 1 0,0-1 0,2-2 0,1 0 0,-1 0 0,3-3 0,0 3 0,0-3 0,3-3 0,0 3 0,0-2 0,2 2 0,1-2 0,-1-1 0,3 1 0,0-4 0,3 4 0,-1-3 0,4 2 0,-1-2 0,0 3 0,3-3 0,0-1 0,3 4 0,0-3 0,-1 2 0,4-2 0,-1 3 0,3-4 0,0 4 0,3-1 0,-1 1 0,1 2 0,2-2 0,0 2 0,0-3 0,3 3 0,0 3 0,0-3 0,3 3 0,-1 0 0,1 0 0,2 2 0,0 1 0,0-1 0,3 3 0,-3 0 0,3 0 0,3 3 0,-3 0 0,2 0 0,-2 2 0,2 1 0,1-1 0,-1 3 0,4 0 0,-4 3 0,3-1 0,-2 4 0,2-1 0,-3 0 0,4 3 0,-1 0 0,-3 3 0,3 0 0,-2-1 0,2 4 0,-3-1 0,4 3 0,-4 0 0,1 3 0,-1-1 0,-2 1 0,2 2 0,-2 0 0,3 0 0,-3 3 0,-3 0 0,3 0 0,-3 3 0,0-1 0,0 1 0,-2 2 0,-1 0 0,1 0 0,-3 3 0,0-3 0,0 3 0,-3 3 0,0-3 0,0 2 0,-2-2 0,-1 2 0,1 1 0,-3-1 0,0 4 0,-3-4 0,1 3 0,-4-2 0,1 2 0,0-3 0,-3 4 0</inkml:trace>
-  <inkml:trace contextRef="#ctx0" brushRef="#br0">14099 24092,'353'-129</inkml:trace>
-  <inkml:trace contextRef="#ctx0" brushRef="#br0">20284 21599,'534'61,"-905"329</inkml:trace>
-  <inkml:trace contextRef="#ctx0" brushRef="#br0">14835 23825,'576'-207</inkml:trace>
-  <inkml:trace contextRef="#ctx0" brushRef="#br0">15793 23479,'592'-215</inkml:trace>
-  <inkml:trace contextRef="#ctx0" brushRef="#br0">16767 23126,'394'-142</inkml:trace>
-  <inkml:trace contextRef="#ctx0" brushRef="#br0">17543 22846,'328'-120</inkml:trace>
-  <inkml:trace contextRef="#ctx0" brushRef="#br0">18254 22588,'428'-155</inkml:trace>
-  <inkml:trace contextRef="#ctx0" brushRef="#br0">19064 22294,'384'-138</inkml:trace>
-  <inkml:trace contextRef="#ctx0" brushRef="#br0">19831 22018,'987'-358</inkml:trace>
-  <inkml:trace contextRef="#ctx0" brushRef="#br0">17249 20323,'48'-121</inkml:trace>
-  <inkml:trace contextRef="#ctx0" brushRef="#br0">17639 18694,'402'-357,"-356"893</inkml:trace>
-  <inkml:trace contextRef="#ctx0" brushRef="#br0">17449 19820,'79'-196</inkml:trace>
-  <inkml:trace contextRef="#ctx0" brushRef="#br0">17680 19242,'38'-98</inkml:trace>
-  <inkml:trace contextRef="#ctx0" brushRef="#br0">17872 18761,'169'-424</inkml:trace>
-  <inkml:trace contextRef="#ctx0" brushRef="#br0">2739 20420,'2689'-8</inkml:trace>
-  <inkml:trace contextRef="#ctx0" brushRef="#br0">4946 20174,'482'238,"-962"4</inkml:trace>
-  <inkml:trace contextRef="#ctx0" brushRef="#br0">7186 20519,'2274'111</inkml:trace>
-  <inkml:trace contextRef="#ctx0" brushRef="#br0">8991 20367,'469'263,"-961"-46</inkml:trace>
-  <inkml:trace contextRef="#ctx0" brushRef="#br0">11161 20448,'1856'-2090</inkml:trace>
-  <inkml:trace contextRef="#ctx0" brushRef="#br0">12517 18558,'500'-200,"-640"719</inkml:trace>
-  <inkml:trace contextRef="#ctx0" brushRef="#br0">14364 18458,'1698'2357</inkml:trace>
-  <inkml:trace contextRef="#ctx0" brushRef="#br0">15947 20105,'115'710,"-753"-1044</inkml:trace>
-  <inkml:trace contextRef="#ctx0" brushRef="#br0">19085 18126,'1867'2034</inkml:trace>
-  <inkml:trace contextRef="#ctx0" brushRef="#br0">20846 19792,'106'368,"-463"-505</inkml:trace>
-  <inkml:trace contextRef="#ctx0" brushRef="#br0">10955 21772,'1614'1905</inkml:trace>
-  <inkml:trace contextRef="#ctx0" brushRef="#br0">12471 23276,'98'401,"-478"-564</inkml:trace>
-</inkml:ink>
-</file>
-
-<file path=ppt/ink/ink2.xml><?xml version="1.0" encoding="utf-8"?>
-<inkml:ink xmlns:inkml="http://www.w3.org/2003/InkML">
-  <inkml:definitions>
-    <inkml:context xml:id="ctx0">
-      <inkml:inkSource xml:id="inkSrc0">
-        <inkml:traceFormat>
           <inkml:channel name="X" type="integer" min="-2.14748E9" max="2.14748E9" units="cm"/>
           <inkml:channel name="Y" type="integer" min="-2.14748E9" max="2.14748E9" units="cm"/>
           <inkml:channel name="F" type="integer" max="32767" units="dev"/>
@@ -4455,7 +4366,7 @@
 </inkml:ink>
 </file>
 
-<file path=ppt/ink/ink3.xml><?xml version="1.0" encoding="utf-8"?>
+<file path=ppt/ink/ink2.xml><?xml version="1.0" encoding="utf-8"?>
 <inkml:ink xmlns:inkml="http://www.w3.org/2003/InkML">
   <inkml:definitions>
     <inkml:context xml:id="ctx0">
@@ -4567,7 +4478,7 @@
             <a:pPr rtl="0"/>
             <a:fld id="{BA214D3A-912A-4866-90B4-0232CEDB2416}" type="datetime1">
               <a:rPr lang="tr-TR" noProof="0" smtClean="0"/>
-              <a:t>28.03.2024</a:t>
+              <a:t>15.04.2025</a:t>
             </a:fld>
             <a:endParaRPr lang="tr-TR" noProof="0"/>
           </a:p>
@@ -5074,7 +4985,7 @@
             <a:pPr rtl="0"/>
             <a:fld id="{D5939589-3E79-4C82-AA4A-FE78234FAA59}" type="slidenum">
               <a:rPr lang="tr-TR" smtClean="0"/>
-              <a:t>11</a:t>
+              <a:t>10</a:t>
             </a:fld>
             <a:endParaRPr lang="tr-TR"/>
           </a:p>
@@ -5159,7 +5070,7 @@
             <a:pPr rtl="0"/>
             <a:fld id="{D5939589-3E79-4C82-AA4A-FE78234FAA59}" type="slidenum">
               <a:rPr lang="tr-TR" smtClean="0"/>
-              <a:t>13</a:t>
+              <a:t>12</a:t>
             </a:fld>
             <a:endParaRPr lang="tr-TR"/>
           </a:p>
@@ -16418,368 +16329,8 @@
           <a:chExt cx="0" cy="0"/>
         </a:xfrm>
       </p:grpSpPr>
-      <p:sp>
-        <p:nvSpPr>
-          <p:cNvPr id="2" name="Başlık 1">
-            <a:extLst>
-              <a:ext uri="{FF2B5EF4-FFF2-40B4-BE49-F238E27FC236}">
-                <a16:creationId xmlns:a16="http://schemas.microsoft.com/office/drawing/2014/main" id="{747E3FAA-0AE4-CD68-3EAC-CEEB3B23C671}"/>
-              </a:ext>
-            </a:extLst>
-          </p:cNvPr>
-          <p:cNvSpPr>
-            <a:spLocks noGrp="1"/>
-          </p:cNvSpPr>
-          <p:nvPr>
-            <p:ph type="title"/>
-          </p:nvPr>
-        </p:nvSpPr>
-        <p:spPr>
-          <a:xfrm>
-            <a:off x="508837" y="-4669"/>
-            <a:ext cx="10771632" cy="1325563"/>
-          </a:xfrm>
-        </p:spPr>
-        <p:txBody>
-          <a:bodyPr/>
-          <a:lstStyle/>
-          <a:p>
-            <a:r>
-              <a:rPr lang="tr-TR"/>
-              <a:t>Yasal fizibilite</a:t>
-            </a:r>
-          </a:p>
-        </p:txBody>
-      </p:sp>
-      <p:pic>
-        <p:nvPicPr>
-          <p:cNvPr id="5" name="İçerik Yer Tutucusu 4">
-            <a:extLst>
-              <a:ext uri="{FF2B5EF4-FFF2-40B4-BE49-F238E27FC236}">
-                <a16:creationId xmlns:a16="http://schemas.microsoft.com/office/drawing/2014/main" id="{979CEBA9-43A8-9C6F-E645-ADF545B1E1B3}"/>
-              </a:ext>
-            </a:extLst>
-          </p:cNvPr>
-          <p:cNvPicPr>
-            <a:picLocks noGrp="1" noChangeAspect="1"/>
-          </p:cNvPicPr>
-          <p:nvPr>
-            <p:ph idx="1"/>
-          </p:nvPr>
-        </p:nvPicPr>
-        <p:blipFill>
-          <a:blip r:embed="rId2"/>
-          <a:stretch>
-            <a:fillRect/>
-          </a:stretch>
-        </p:blipFill>
-        <p:spPr>
-          <a:xfrm>
-            <a:off x="7854952" y="2358540"/>
-            <a:ext cx="2954132" cy="2954132"/>
-          </a:xfrm>
-        </p:spPr>
-      </p:pic>
-      <p:sp>
-        <p:nvSpPr>
-          <p:cNvPr id="7" name="Footer Placeholder 4">
-            <a:extLst>
-              <a:ext uri="{FF2B5EF4-FFF2-40B4-BE49-F238E27FC236}">
-                <a16:creationId xmlns:a16="http://schemas.microsoft.com/office/drawing/2014/main" id="{9216AFD6-ECDE-8EAD-2879-41824BC87E48}"/>
-              </a:ext>
-            </a:extLst>
-          </p:cNvPr>
-          <p:cNvSpPr>
-            <a:spLocks noGrp="1"/>
-          </p:cNvSpPr>
-          <p:nvPr>
-            <p:ph type="ftr" sz="quarter" idx="11"/>
-          </p:nvPr>
-        </p:nvSpPr>
-        <p:spPr>
-          <a:xfrm rot="5400000">
-            <a:off x="9953243" y="1792956"/>
-            <a:ext cx="2788920" cy="365125"/>
-          </a:xfrm>
-        </p:spPr>
-        <p:txBody>
-          <a:bodyPr/>
-          <a:lstStyle/>
-          <a:p>
-            <a:pPr rtl="0">
-              <a:spcAft>
-                <a:spcPts val="600"/>
-              </a:spcAft>
-            </a:pPr>
-            <a:r>
-              <a:rPr lang="tr-TR"/>
-              <a:t>Hilal </a:t>
-            </a:r>
-            <a:r>
-              <a:rPr lang="tr-TR" err="1"/>
-              <a:t>dedek</a:t>
-            </a:r>
-            <a:endParaRPr lang="tr-TR" noProof="0"/>
-          </a:p>
-        </p:txBody>
-      </p:sp>
-      <p:cxnSp>
-        <p:nvCxnSpPr>
-          <p:cNvPr id="8" name="Düz Bağlayıcı 7">
-            <a:extLst>
-              <a:ext uri="{FF2B5EF4-FFF2-40B4-BE49-F238E27FC236}">
-                <a16:creationId xmlns:a16="http://schemas.microsoft.com/office/drawing/2014/main" id="{5CB614C5-2158-8D41-32FA-2562ABC946AA}"/>
-              </a:ext>
-            </a:extLst>
-          </p:cNvPr>
-          <p:cNvCxnSpPr>
-            <a:cxnSpLocks/>
-          </p:cNvCxnSpPr>
-          <p:nvPr/>
-        </p:nvCxnSpPr>
-        <p:spPr>
-          <a:xfrm>
-            <a:off x="11347704" y="3174124"/>
-            <a:ext cx="0" cy="3683876"/>
-          </a:xfrm>
-          <a:prstGeom prst="line">
-            <a:avLst/>
-          </a:prstGeom>
-          <a:ln w="28575">
-            <a:solidFill>
-              <a:schemeClr val="bg1">
-                <a:lumMod val="95000"/>
-              </a:schemeClr>
-            </a:solidFill>
-          </a:ln>
-        </p:spPr>
-        <p:style>
-          <a:lnRef idx="1">
-            <a:schemeClr val="accent1"/>
-          </a:lnRef>
-          <a:fillRef idx="0">
-            <a:schemeClr val="accent1"/>
-          </a:fillRef>
-          <a:effectRef idx="0">
-            <a:schemeClr val="accent1"/>
-          </a:effectRef>
-          <a:fontRef idx="minor">
-            <a:schemeClr val="tx1"/>
-          </a:fontRef>
-        </p:style>
-      </p:cxnSp>
-      <p:sp>
-        <p:nvSpPr>
-          <p:cNvPr id="3" name="Metin kutusu 2">
-            <a:extLst>
-              <a:ext uri="{FF2B5EF4-FFF2-40B4-BE49-F238E27FC236}">
-                <a16:creationId xmlns:a16="http://schemas.microsoft.com/office/drawing/2014/main" id="{B757B7F8-DC2B-49BB-806F-0CB9C56AF2F0}"/>
-              </a:ext>
-            </a:extLst>
-          </p:cNvPr>
-          <p:cNvSpPr txBox="1"/>
-          <p:nvPr/>
-        </p:nvSpPr>
-        <p:spPr>
-          <a:xfrm>
-            <a:off x="234046" y="1134725"/>
-            <a:ext cx="7279325" cy="5570756"/>
-          </a:xfrm>
-          <a:prstGeom prst="rect">
-            <a:avLst/>
-          </a:prstGeom>
-          <a:noFill/>
-        </p:spPr>
-        <p:txBody>
-          <a:bodyPr wrap="square" lIns="91440" tIns="45720" rIns="91440" bIns="45720" rtlCol="0" anchor="t">
-            <a:spAutoFit/>
-          </a:bodyPr>
-          <a:lstStyle/>
-          <a:p>
-            <a:pPr marL="342900" indent="-342900">
-              <a:buFont typeface="Arial"/>
-              <a:buChar char="•"/>
-            </a:pPr>
-            <a:r>
-              <a:rPr lang="tr-TR" sz="2200" i="0" u="none" strike="noStrike">
-                <a:solidFill>
-                  <a:schemeClr val="bg1"/>
-                </a:solidFill>
-                <a:effectLst/>
-                <a:latin typeface="univers"/>
-              </a:rPr>
-              <a:t>6698-Kişisel Verilerin Korunması Kanunu</a:t>
-            </a:r>
-            <a:endParaRPr lang="tr-TR" sz="2200" i="0" u="none" strike="noStrike">
-              <a:solidFill>
-                <a:schemeClr val="bg1"/>
-              </a:solidFill>
-              <a:latin typeface="univers"/>
-            </a:endParaRPr>
-          </a:p>
-          <a:p>
-            <a:pPr marL="342900" indent="-342900">
-              <a:buFont typeface="Arial"/>
-              <a:buChar char="•"/>
-            </a:pPr>
-            <a:r>
-              <a:rPr lang="tr-TR" sz="2200">
-                <a:solidFill>
-                  <a:schemeClr val="bg1"/>
-                </a:solidFill>
-                <a:latin typeface="univers"/>
-              </a:rPr>
-              <a:t>6502-Tüketicinin</a:t>
-            </a:r>
-            <a:r>
-              <a:rPr lang="tr-TR" sz="2200" b="0" i="0">
-                <a:solidFill>
-                  <a:schemeClr val="bg1"/>
-                </a:solidFill>
-                <a:effectLst/>
-                <a:latin typeface="univers"/>
-              </a:rPr>
-              <a:t> Korunması Kanunu</a:t>
-            </a:r>
-            <a:endParaRPr lang="tr-TR" sz="2200" b="0" i="0">
-              <a:solidFill>
-                <a:schemeClr val="bg1"/>
-              </a:solidFill>
-              <a:latin typeface="univers"/>
-            </a:endParaRPr>
-          </a:p>
-          <a:p>
-            <a:pPr marL="342900" indent="-342900">
-              <a:buFont typeface="Arial"/>
-              <a:buChar char="•"/>
-            </a:pPr>
-            <a:r>
-              <a:rPr lang="tr-TR" sz="2200">
-                <a:solidFill>
-                  <a:schemeClr val="bg1"/>
-                </a:solidFill>
-                <a:latin typeface="univers"/>
-              </a:rPr>
-              <a:t>5746/2-Araştırma,Geliştirme ve Tasarım Faaliyetlerinin Desteklenmesi Kanunu</a:t>
-            </a:r>
-          </a:p>
-          <a:p>
-            <a:pPr marL="342900" indent="-342900">
-              <a:buFont typeface="Arial"/>
-              <a:buChar char="•"/>
-            </a:pPr>
-            <a:r>
-              <a:rPr lang="tr-TR" sz="2200">
-                <a:solidFill>
-                  <a:schemeClr val="bg1"/>
-                </a:solidFill>
-                <a:latin typeface="univers"/>
-              </a:rPr>
-              <a:t>5651-İnternet Ortamında Yapılan Yayınların Düzenlenmesi Ve Bu Yayınlar Yoluyla İşlenen Suçlarla Mücadele Edilmesi Kanunu</a:t>
-            </a:r>
-          </a:p>
-          <a:p>
-            <a:r>
-              <a:rPr lang="tr-TR" sz="2200" i="0">
-                <a:solidFill>
-                  <a:schemeClr val="bg1"/>
-                </a:solidFill>
-                <a:effectLst/>
-                <a:latin typeface="univers"/>
-              </a:rPr>
-              <a:t>Yukarıdaki </a:t>
-            </a:r>
-            <a:r>
-              <a:rPr lang="tr-TR" sz="2200">
-                <a:solidFill>
-                  <a:schemeClr val="bg1"/>
-                </a:solidFill>
-                <a:latin typeface="univers"/>
-              </a:rPr>
-              <a:t>kanunlarca projenin geliştirilmesinde sıkıntı çıkaracak herhangi bir durum tespit edilmemiştir.</a:t>
-            </a:r>
-          </a:p>
-          <a:p>
-            <a:r>
-              <a:rPr lang="tr-TR" sz="2200" i="0">
-                <a:solidFill>
-                  <a:schemeClr val="bg1"/>
-                </a:solidFill>
-                <a:effectLst/>
-                <a:latin typeface="univers"/>
-              </a:rPr>
-              <a:t>Sonuç olarak</a:t>
-            </a:r>
-            <a:r>
-              <a:rPr lang="tr-TR" sz="2200">
-                <a:solidFill>
-                  <a:schemeClr val="bg1"/>
-                </a:solidFill>
-                <a:latin typeface="univers"/>
-              </a:rPr>
-              <a:t> bu proje yasal</a:t>
-            </a:r>
-            <a:r>
-              <a:rPr lang="tr-TR" sz="2200" b="0" i="0">
-                <a:solidFill>
-                  <a:schemeClr val="bg1"/>
-                </a:solidFill>
-                <a:effectLst/>
-                <a:latin typeface="univers"/>
-              </a:rPr>
-              <a:t> düzenlemelere, yönetmeliklere, yerel ve ulusal yasalara uygundur. Projemiz için gerekli olan izinler, sözleşmeler ve diğer yasal belgelerin elde edilmesinde hiçbir sıkıntı çıkmamıştır.</a:t>
-            </a:r>
-            <a:endParaRPr lang="tr-TR" sz="2200" b="0" i="0">
-              <a:solidFill>
-                <a:schemeClr val="bg1"/>
-              </a:solidFill>
-              <a:latin typeface="univers"/>
-            </a:endParaRPr>
-          </a:p>
-          <a:p>
-            <a:endParaRPr lang="tr-TR" sz="2200" i="0">
-              <a:solidFill>
-                <a:schemeClr val="bg1">
-                  <a:lumMod val="95000"/>
-                </a:schemeClr>
-              </a:solidFill>
-              <a:effectLst/>
-            </a:endParaRPr>
-          </a:p>
-        </p:txBody>
-      </p:sp>
-    </p:spTree>
-    <p:extLst>
-      <p:ext uri="{BB962C8B-B14F-4D97-AF65-F5344CB8AC3E}">
-        <p14:creationId xmlns:p14="http://schemas.microsoft.com/office/powerpoint/2010/main" val="1263121598"/>
-      </p:ext>
-    </p:extLst>
-  </p:cSld>
-  <p:clrMapOvr>
-    <a:masterClrMapping/>
-  </p:clrMapOvr>
-</p:sld>
-</file>
-
-<file path=ppt/slides/slide11.xml><?xml version="1.0" encoding="utf-8"?>
-<p:sld xmlns:a="http://schemas.openxmlformats.org/drawingml/2006/main" xmlns:r="http://schemas.openxmlformats.org/officeDocument/2006/relationships" xmlns:p="http://schemas.openxmlformats.org/presentationml/2006/main">
-  <p:cSld>
-    <p:spTree>
-      <p:nvGrpSpPr>
-        <p:cNvPr id="1" name=""/>
-        <p:cNvGrpSpPr/>
-        <p:nvPr/>
-      </p:nvGrpSpPr>
-      <p:grpSpPr>
-        <a:xfrm>
-          <a:off x="0" y="0"/>
-          <a:ext cx="0" cy="0"/>
-          <a:chOff x="0" y="0"/>
-          <a:chExt cx="0" cy="0"/>
-        </a:xfrm>
-      </p:grpSpPr>
-      <mc:AlternateContent xmlns:mc="http://schemas.openxmlformats.org/markup-compatibility/2006">
-        <mc:Choice xmlns:p14="http://schemas.microsoft.com/office/powerpoint/2010/main" Requires="p14">
+      <mc:AlternateContent xmlns:mc="http://schemas.openxmlformats.org/markup-compatibility/2006" xmlns:p14="http://schemas.microsoft.com/office/powerpoint/2010/main">
+        <mc:Choice Requires="p14">
           <p:contentPart p14:bwMode="auto" r:id="rId3">
             <p14:nvContentPartPr>
               <p14:cNvPr id="14" name="Mürekkep 13">
@@ -16798,7 +16349,7 @@
             </p14:xfrm>
           </p:contentPart>
         </mc:Choice>
-        <mc:Fallback>
+        <mc:Fallback xmlns="">
           <p:pic>
             <p:nvPicPr>
               <p:cNvPr id="14" name="Mürekkep 13">
@@ -16829,8 +16380,8 @@
           </p:pic>
         </mc:Fallback>
       </mc:AlternateContent>
-      <mc:AlternateContent xmlns:mc="http://schemas.openxmlformats.org/markup-compatibility/2006">
-        <mc:Choice xmlns:p14="http://schemas.microsoft.com/office/powerpoint/2010/main" Requires="p14">
+      <mc:AlternateContent xmlns:mc="http://schemas.openxmlformats.org/markup-compatibility/2006" xmlns:p14="http://schemas.microsoft.com/office/powerpoint/2010/main">
+        <mc:Choice Requires="p14">
           <p:contentPart p14:bwMode="auto" r:id="rId5">
             <p14:nvContentPartPr>
               <p14:cNvPr id="15" name="Mürekkep 14">
@@ -16849,7 +16400,7 @@
             </p14:xfrm>
           </p:contentPart>
         </mc:Choice>
-        <mc:Fallback>
+        <mc:Fallback xmlns="">
           <p:pic>
             <p:nvPicPr>
               <p:cNvPr id="15" name="Mürekkep 14">
@@ -19338,7 +18889,7 @@
 </p:sld>
 </file>
 
-<file path=ppt/slides/slide12.xml><?xml version="1.0" encoding="utf-8"?>
+<file path=ppt/slides/slide11.xml><?xml version="1.0" encoding="utf-8"?>
 <p:sld xmlns:a="http://schemas.openxmlformats.org/drawingml/2006/main" xmlns:r="http://schemas.openxmlformats.org/officeDocument/2006/relationships" xmlns:p="http://schemas.openxmlformats.org/presentationml/2006/main">
   <p:cSld>
     <p:spTree>
@@ -19558,7 +19109,7 @@
 </p:sld>
 </file>
 
-<file path=ppt/slides/slide13.xml><?xml version="1.0" encoding="utf-8"?>
+<file path=ppt/slides/slide12.xml><?xml version="1.0" encoding="utf-8"?>
 <p:sld xmlns:a="http://schemas.openxmlformats.org/drawingml/2006/main" xmlns:r="http://schemas.openxmlformats.org/officeDocument/2006/relationships" xmlns:p="http://schemas.openxmlformats.org/presentationml/2006/main">
   <p:cSld>
     <p:spTree>
@@ -22306,3195 +21857,6 @@
             <p:ph type="title"/>
           </p:nvPr>
         </p:nvSpPr>
-        <p:spPr>
-          <a:xfrm>
-            <a:off x="393907" y="139688"/>
-            <a:ext cx="10771632" cy="1325563"/>
-          </a:xfrm>
-        </p:spPr>
-        <p:txBody>
-          <a:bodyPr>
-            <a:normAutofit/>
-          </a:bodyPr>
-          <a:lstStyle/>
-          <a:p>
-            <a:r>
-              <a:rPr lang="tr-TR"/>
-              <a:t>Zaman Fizibilitesi</a:t>
-            </a:r>
-            <a:r>
-              <a:rPr lang="en-US"/>
-              <a:t> – CPM</a:t>
-            </a:r>
-            <a:endParaRPr lang="tr-TR"/>
-          </a:p>
-        </p:txBody>
-      </p:sp>
-      <p:sp>
-        <p:nvSpPr>
-          <p:cNvPr id="7" name="Footer Placeholder 4">
-            <a:extLst>
-              <a:ext uri="{FF2B5EF4-FFF2-40B4-BE49-F238E27FC236}">
-                <a16:creationId xmlns:a16="http://schemas.microsoft.com/office/drawing/2014/main" id="{9216AFD6-ECDE-8EAD-2879-41824BC87E48}"/>
-              </a:ext>
-            </a:extLst>
-          </p:cNvPr>
-          <p:cNvSpPr>
-            <a:spLocks noGrp="1"/>
-          </p:cNvSpPr>
-          <p:nvPr>
-            <p:ph type="ftr" sz="quarter" idx="11"/>
-          </p:nvPr>
-        </p:nvSpPr>
-        <p:spPr>
-          <a:xfrm rot="5400000">
-            <a:off x="9953243" y="1792956"/>
-            <a:ext cx="2788920" cy="365125"/>
-          </a:xfrm>
-        </p:spPr>
-        <p:txBody>
-          <a:bodyPr/>
-          <a:lstStyle/>
-          <a:p>
-            <a:pPr rtl="0">
-              <a:spcAft>
-                <a:spcPts val="600"/>
-              </a:spcAft>
-            </a:pPr>
-            <a:r>
-              <a:rPr lang="tr-TR" noProof="0"/>
-              <a:t>Barış Keskin</a:t>
-            </a:r>
-          </a:p>
-        </p:txBody>
-      </p:sp>
-      <p:cxnSp>
-        <p:nvCxnSpPr>
-          <p:cNvPr id="8" name="Düz Bağlayıcı 7">
-            <a:extLst>
-              <a:ext uri="{FF2B5EF4-FFF2-40B4-BE49-F238E27FC236}">
-                <a16:creationId xmlns:a16="http://schemas.microsoft.com/office/drawing/2014/main" id="{5CB614C5-2158-8D41-32FA-2562ABC946AA}"/>
-              </a:ext>
-            </a:extLst>
-          </p:cNvPr>
-          <p:cNvCxnSpPr>
-            <a:cxnSpLocks/>
-          </p:cNvCxnSpPr>
-          <p:nvPr/>
-        </p:nvCxnSpPr>
-        <p:spPr>
-          <a:xfrm>
-            <a:off x="11347704" y="3174124"/>
-            <a:ext cx="0" cy="3683876"/>
-          </a:xfrm>
-          <a:prstGeom prst="line">
-            <a:avLst/>
-          </a:prstGeom>
-          <a:ln w="28575">
-            <a:solidFill>
-              <a:schemeClr val="bg1">
-                <a:lumMod val="95000"/>
-              </a:schemeClr>
-            </a:solidFill>
-          </a:ln>
-        </p:spPr>
-        <p:style>
-          <a:lnRef idx="1">
-            <a:schemeClr val="accent1"/>
-          </a:lnRef>
-          <a:fillRef idx="0">
-            <a:schemeClr val="accent1"/>
-          </a:fillRef>
-          <a:effectRef idx="0">
-            <a:schemeClr val="accent1"/>
-          </a:effectRef>
-          <a:fontRef idx="minor">
-            <a:schemeClr val="tx1"/>
-          </a:fontRef>
-        </p:style>
-      </p:cxnSp>
-      <p:graphicFrame>
-        <p:nvGraphicFramePr>
-          <p:cNvPr id="24" name="İçerik Yer Tutucusu 23">
-            <a:extLst>
-              <a:ext uri="{FF2B5EF4-FFF2-40B4-BE49-F238E27FC236}">
-                <a16:creationId xmlns:a16="http://schemas.microsoft.com/office/drawing/2014/main" id="{37F41D76-DE24-1EC7-700D-FD795AA9C24A}"/>
-              </a:ext>
-            </a:extLst>
-          </p:cNvPr>
-          <p:cNvGraphicFramePr>
-            <a:graphicFrameLocks noGrp="1"/>
-          </p:cNvGraphicFramePr>
-          <p:nvPr>
-            <p:ph idx="1"/>
-            <p:extLst>
-              <p:ext uri="{D42A27DB-BD31-4B8C-83A1-F6EECF244321}">
-                <p14:modId xmlns:p14="http://schemas.microsoft.com/office/powerpoint/2010/main" val="897483487"/>
-              </p:ext>
-            </p:extLst>
-          </p:nvPr>
-        </p:nvGraphicFramePr>
-        <p:xfrm>
-          <a:off x="393906" y="1283535"/>
-          <a:ext cx="10164225" cy="2108408"/>
-        </p:xfrm>
-        <a:graphic>
-          <a:graphicData uri="http://schemas.openxmlformats.org/drawingml/2006/table">
-            <a:tbl>
-              <a:tblPr>
-                <a:tableStyleId>{5940675A-B579-460E-94D1-54222C63F5DA}</a:tableStyleId>
-              </a:tblPr>
-              <a:tblGrid>
-                <a:gridCol w="2118206">
-                  <a:extLst>
-                    <a:ext uri="{9D8B030D-6E8A-4147-A177-3AD203B41FA5}">
-                      <a16:colId xmlns:a16="http://schemas.microsoft.com/office/drawing/2014/main" val="3288226570"/>
-                    </a:ext>
-                  </a:extLst>
-                </a:gridCol>
-                <a:gridCol w="1879135">
-                  <a:extLst>
-                    <a:ext uri="{9D8B030D-6E8A-4147-A177-3AD203B41FA5}">
-                      <a16:colId xmlns:a16="http://schemas.microsoft.com/office/drawing/2014/main" val="2003916309"/>
-                    </a:ext>
-                  </a:extLst>
-                </a:gridCol>
-                <a:gridCol w="1977655">
-                  <a:extLst>
-                    <a:ext uri="{9D8B030D-6E8A-4147-A177-3AD203B41FA5}">
-                      <a16:colId xmlns:a16="http://schemas.microsoft.com/office/drawing/2014/main" val="4104658731"/>
-                    </a:ext>
-                  </a:extLst>
-                </a:gridCol>
-                <a:gridCol w="1880552">
-                  <a:extLst>
-                    <a:ext uri="{9D8B030D-6E8A-4147-A177-3AD203B41FA5}">
-                      <a16:colId xmlns:a16="http://schemas.microsoft.com/office/drawing/2014/main" val="2661997036"/>
-                    </a:ext>
-                  </a:extLst>
-                </a:gridCol>
-                <a:gridCol w="1012462">
-                  <a:extLst>
-                    <a:ext uri="{9D8B030D-6E8A-4147-A177-3AD203B41FA5}">
-                      <a16:colId xmlns:a16="http://schemas.microsoft.com/office/drawing/2014/main" val="2040400250"/>
-                    </a:ext>
-                  </a:extLst>
-                </a:gridCol>
-                <a:gridCol w="1296215">
-                  <a:extLst>
-                    <a:ext uri="{9D8B030D-6E8A-4147-A177-3AD203B41FA5}">
-                      <a16:colId xmlns:a16="http://schemas.microsoft.com/office/drawing/2014/main" val="766312783"/>
-                    </a:ext>
-                  </a:extLst>
-                </a:gridCol>
-              </a:tblGrid>
-              <a:tr h="252001">
-                <a:tc>
-                  <a:txBody>
-                    <a:bodyPr/>
-                    <a:lstStyle/>
-                    <a:p>
-                      <a:pPr algn="ctr" fontAlgn="b"/>
-                      <a:r>
-                        <a:rPr lang="tr-TR" sz="1000" b="1" u="none" strike="noStrike">
-                          <a:solidFill>
-                            <a:schemeClr val="bg1"/>
-                          </a:solidFill>
-                          <a:effectLst/>
-                        </a:rPr>
-                        <a:t>Faaliyetler</a:t>
-                      </a:r>
-                      <a:endParaRPr lang="tr-TR" sz="1000" b="1" i="0" u="none" strike="noStrike">
-                        <a:solidFill>
-                          <a:schemeClr val="bg1"/>
-                        </a:solidFill>
-                        <a:effectLst/>
-                        <a:latin typeface="Arial" panose="020B0604020202020204" pitchFamily="34" charset="0"/>
-                      </a:endParaRPr>
-                    </a:p>
-                  </a:txBody>
-                  <a:tcPr marL="7846" marR="7846" marT="7846" marB="0" anchor="ctr"/>
-                </a:tc>
-                <a:tc>
-                  <a:txBody>
-                    <a:bodyPr/>
-                    <a:lstStyle/>
-                    <a:p>
-                      <a:pPr algn="ctr" fontAlgn="b"/>
-                      <a:r>
-                        <a:rPr lang="tr-TR" sz="1000" b="1" u="none" strike="noStrike">
-                          <a:solidFill>
-                            <a:schemeClr val="bg1"/>
-                          </a:solidFill>
-                          <a:effectLst/>
-                        </a:rPr>
-                        <a:t>Kısaltılmış Gösterim</a:t>
-                      </a:r>
-                      <a:endParaRPr lang="tr-TR" sz="1000" b="1" i="0" u="none" strike="noStrike">
-                        <a:solidFill>
-                          <a:schemeClr val="bg1"/>
-                        </a:solidFill>
-                        <a:effectLst/>
-                        <a:latin typeface="Arial" panose="020B0604020202020204" pitchFamily="34" charset="0"/>
-                      </a:endParaRPr>
-                    </a:p>
-                  </a:txBody>
-                  <a:tcPr marL="7846" marR="7846" marT="7846" marB="0" anchor="ctr"/>
-                </a:tc>
-                <a:tc>
-                  <a:txBody>
-                    <a:bodyPr/>
-                    <a:lstStyle/>
-                    <a:p>
-                      <a:pPr algn="ctr" fontAlgn="b"/>
-                      <a:r>
-                        <a:rPr lang="tr-TR" sz="1000" b="1" u="none" strike="noStrike" dirty="0">
-                          <a:solidFill>
-                            <a:schemeClr val="bg1"/>
-                          </a:solidFill>
-                          <a:effectLst/>
-                        </a:rPr>
-                        <a:t>Önceki Faaliyetler</a:t>
-                      </a:r>
-                      <a:endParaRPr lang="tr-TR" sz="1000" b="1" i="0" u="none" strike="noStrike" dirty="0">
-                        <a:solidFill>
-                          <a:schemeClr val="bg1"/>
-                        </a:solidFill>
-                        <a:effectLst/>
-                        <a:latin typeface="Arial" panose="020B0604020202020204" pitchFamily="34" charset="0"/>
-                      </a:endParaRPr>
-                    </a:p>
-                  </a:txBody>
-                  <a:tcPr marL="7846" marR="7846" marT="7846" marB="0" anchor="ctr"/>
-                </a:tc>
-                <a:tc>
-                  <a:txBody>
-                    <a:bodyPr/>
-                    <a:lstStyle/>
-                    <a:p>
-                      <a:pPr algn="ctr" fontAlgn="b"/>
-                      <a:r>
-                        <a:rPr lang="tr-TR" sz="1000" b="1" u="none" strike="noStrike" dirty="0">
-                          <a:solidFill>
-                            <a:schemeClr val="bg1"/>
-                          </a:solidFill>
-                          <a:effectLst/>
-                        </a:rPr>
-                        <a:t>Normal Süre</a:t>
-                      </a:r>
-                      <a:r>
-                        <a:rPr lang="en-US" sz="1000" b="1" u="none" strike="noStrike" dirty="0">
-                          <a:solidFill>
-                            <a:schemeClr val="bg1"/>
-                          </a:solidFill>
-                          <a:effectLst/>
-                        </a:rPr>
-                        <a:t> ( </a:t>
-                      </a:r>
-                      <a:r>
-                        <a:rPr lang="en-US" sz="1000" b="1" u="none" strike="noStrike" dirty="0" err="1">
-                          <a:solidFill>
-                            <a:schemeClr val="bg1"/>
-                          </a:solidFill>
-                          <a:effectLst/>
-                        </a:rPr>
-                        <a:t>İş</a:t>
-                      </a:r>
-                      <a:r>
-                        <a:rPr lang="en-US" sz="1000" b="1" u="none" strike="noStrike" dirty="0">
-                          <a:solidFill>
-                            <a:schemeClr val="bg1"/>
-                          </a:solidFill>
-                          <a:effectLst/>
-                        </a:rPr>
-                        <a:t> </a:t>
-                      </a:r>
-                      <a:r>
-                        <a:rPr lang="en-US" sz="1000" b="1" u="none" strike="noStrike" dirty="0" err="1">
-                          <a:solidFill>
-                            <a:schemeClr val="bg1"/>
-                          </a:solidFill>
-                          <a:effectLst/>
-                        </a:rPr>
-                        <a:t>Günü</a:t>
-                      </a:r>
-                      <a:r>
-                        <a:rPr lang="en-US" sz="1000" b="1" u="none" strike="noStrike" dirty="0">
-                          <a:solidFill>
-                            <a:schemeClr val="bg1"/>
-                          </a:solidFill>
-                          <a:effectLst/>
-                        </a:rPr>
-                        <a:t> )</a:t>
-                      </a:r>
-                      <a:endParaRPr lang="tr-TR" sz="1000" b="1" i="0" u="none" strike="noStrike" dirty="0">
-                        <a:solidFill>
-                          <a:schemeClr val="bg1"/>
-                        </a:solidFill>
-                        <a:effectLst/>
-                        <a:latin typeface="Arial" panose="020B0604020202020204" pitchFamily="34" charset="0"/>
-                      </a:endParaRPr>
-                    </a:p>
-                  </a:txBody>
-                  <a:tcPr marL="7846" marR="7846" marT="7846" marB="0" anchor="ctr"/>
-                </a:tc>
-                <a:tc>
-                  <a:txBody>
-                    <a:bodyPr/>
-                    <a:lstStyle/>
-                    <a:p>
-                      <a:pPr algn="ctr" fontAlgn="b"/>
-                      <a:r>
-                        <a:rPr lang="tr-TR" sz="1000" b="1" u="none" strike="noStrike">
-                          <a:solidFill>
-                            <a:schemeClr val="bg1"/>
-                          </a:solidFill>
-                          <a:effectLst/>
-                        </a:rPr>
-                        <a:t>Serbest Bolluk</a:t>
-                      </a:r>
-                      <a:endParaRPr lang="tr-TR" sz="1000" b="1" i="0" u="none" strike="noStrike">
-                        <a:solidFill>
-                          <a:schemeClr val="bg1"/>
-                        </a:solidFill>
-                        <a:effectLst/>
-                        <a:latin typeface="Arial" panose="020B0604020202020204" pitchFamily="34" charset="0"/>
-                      </a:endParaRPr>
-                    </a:p>
-                  </a:txBody>
-                  <a:tcPr marL="7846" marR="7846" marT="7846" marB="0" anchor="ctr"/>
-                </a:tc>
-                <a:tc>
-                  <a:txBody>
-                    <a:bodyPr/>
-                    <a:lstStyle/>
-                    <a:p>
-                      <a:pPr algn="ctr" fontAlgn="b"/>
-                      <a:r>
-                        <a:rPr lang="tr-TR" sz="1000" b="1" u="none" strike="noStrike">
-                          <a:solidFill>
-                            <a:schemeClr val="bg1"/>
-                          </a:solidFill>
-                          <a:effectLst/>
-                        </a:rPr>
-                        <a:t>Toplam Bolluk</a:t>
-                      </a:r>
-                      <a:endParaRPr lang="tr-TR" sz="1000" b="1" i="0" u="none" strike="noStrike">
-                        <a:solidFill>
-                          <a:schemeClr val="bg1"/>
-                        </a:solidFill>
-                        <a:effectLst/>
-                        <a:latin typeface="Arial" panose="020B0604020202020204" pitchFamily="34" charset="0"/>
-                      </a:endParaRPr>
-                    </a:p>
-                  </a:txBody>
-                  <a:tcPr marL="7846" marR="7846" marT="7846" marB="0" anchor="ctr"/>
-                </a:tc>
-                <a:extLst>
-                  <a:ext uri="{0D108BD9-81ED-4DB2-BD59-A6C34878D82A}">
-                    <a16:rowId xmlns:a16="http://schemas.microsoft.com/office/drawing/2014/main" val="4256546705"/>
-                  </a:ext>
-                </a:extLst>
-              </a:tr>
-              <a:tr h="252001">
-                <a:tc>
-                  <a:txBody>
-                    <a:bodyPr/>
-                    <a:lstStyle/>
-                    <a:p>
-                      <a:pPr algn="l" fontAlgn="b"/>
-                      <a:r>
-                        <a:rPr lang="tr-TR" sz="1000" b="1" u="none" strike="noStrike">
-                          <a:solidFill>
-                            <a:schemeClr val="bg1"/>
-                          </a:solidFill>
-                          <a:effectLst/>
-                        </a:rPr>
-                        <a:t>Proje Tanıtım ve Planlaması</a:t>
-                      </a:r>
-                      <a:endParaRPr lang="tr-TR" sz="1000" b="1" i="0" u="none" strike="noStrike">
-                        <a:solidFill>
-                          <a:schemeClr val="bg1"/>
-                        </a:solidFill>
-                        <a:effectLst/>
-                        <a:latin typeface="Arial" panose="020B0604020202020204" pitchFamily="34" charset="0"/>
-                      </a:endParaRPr>
-                    </a:p>
-                  </a:txBody>
-                  <a:tcPr marL="7846" marR="7846" marT="7846" marB="0" anchor="ctr"/>
-                </a:tc>
-                <a:tc>
-                  <a:txBody>
-                    <a:bodyPr/>
-                    <a:lstStyle/>
-                    <a:p>
-                      <a:pPr algn="ctr" fontAlgn="b"/>
-                      <a:r>
-                        <a:rPr lang="tr-TR" sz="1000" u="none" strike="noStrike">
-                          <a:solidFill>
-                            <a:schemeClr val="bg1"/>
-                          </a:solidFill>
-                          <a:effectLst/>
-                        </a:rPr>
-                        <a:t>A</a:t>
-                      </a:r>
-                      <a:endParaRPr lang="tr-TR" sz="1000" b="0" i="0" u="none" strike="noStrike">
-                        <a:solidFill>
-                          <a:schemeClr val="bg1"/>
-                        </a:solidFill>
-                        <a:effectLst/>
-                        <a:latin typeface="Arial" panose="020B0604020202020204" pitchFamily="34" charset="0"/>
-                      </a:endParaRPr>
-                    </a:p>
-                  </a:txBody>
-                  <a:tcPr marL="7846" marR="7846" marT="7846" marB="0" anchor="ctr"/>
-                </a:tc>
-                <a:tc>
-                  <a:txBody>
-                    <a:bodyPr/>
-                    <a:lstStyle/>
-                    <a:p>
-                      <a:pPr algn="ctr" fontAlgn="b"/>
-                      <a:r>
-                        <a:rPr lang="tr-TR" sz="1000" u="none" strike="noStrike">
-                          <a:solidFill>
-                            <a:schemeClr val="bg1"/>
-                          </a:solidFill>
-                          <a:effectLst/>
-                        </a:rPr>
-                        <a:t>-</a:t>
-                      </a:r>
-                      <a:endParaRPr lang="tr-TR" sz="1000" b="0" i="0" u="none" strike="noStrike">
-                        <a:solidFill>
-                          <a:schemeClr val="bg1"/>
-                        </a:solidFill>
-                        <a:effectLst/>
-                        <a:latin typeface="Arial" panose="020B0604020202020204" pitchFamily="34" charset="0"/>
-                      </a:endParaRPr>
-                    </a:p>
-                  </a:txBody>
-                  <a:tcPr marL="7846" marR="7846" marT="7846" marB="0" anchor="ctr"/>
-                </a:tc>
-                <a:tc>
-                  <a:txBody>
-                    <a:bodyPr/>
-                    <a:lstStyle/>
-                    <a:p>
-                      <a:pPr algn="ctr" fontAlgn="b"/>
-                      <a:r>
-                        <a:rPr lang="en-US" sz="1000" b="0" i="0" u="none" strike="noStrike" dirty="0">
-                          <a:solidFill>
-                            <a:schemeClr val="bg1"/>
-                          </a:solidFill>
-                          <a:effectLst/>
-                          <a:latin typeface="Arial" panose="020B0604020202020204" pitchFamily="34" charset="0"/>
-                        </a:rPr>
-                        <a:t>5</a:t>
-                      </a:r>
-                      <a:endParaRPr lang="tr-TR" sz="1000" b="0" i="0" u="none" strike="noStrike" dirty="0">
-                        <a:solidFill>
-                          <a:schemeClr val="bg1"/>
-                        </a:solidFill>
-                        <a:effectLst/>
-                        <a:latin typeface="Arial" panose="020B0604020202020204" pitchFamily="34" charset="0"/>
-                      </a:endParaRPr>
-                    </a:p>
-                  </a:txBody>
-                  <a:tcPr marL="7846" marR="7846" marT="7846" marB="0" anchor="ctr"/>
-                </a:tc>
-                <a:tc>
-                  <a:txBody>
-                    <a:bodyPr/>
-                    <a:lstStyle/>
-                    <a:p>
-                      <a:pPr algn="ctr" fontAlgn="b"/>
-                      <a:endParaRPr lang="tr-TR" sz="1000" b="0" i="0" u="none" strike="noStrike">
-                        <a:solidFill>
-                          <a:schemeClr val="bg1"/>
-                        </a:solidFill>
-                        <a:effectLst/>
-                        <a:latin typeface="Arial" panose="020B0604020202020204" pitchFamily="34" charset="0"/>
-                      </a:endParaRPr>
-                    </a:p>
-                  </a:txBody>
-                  <a:tcPr marL="7846" marR="7846" marT="7846" marB="0" anchor="ctr"/>
-                </a:tc>
-                <a:tc>
-                  <a:txBody>
-                    <a:bodyPr/>
-                    <a:lstStyle/>
-                    <a:p>
-                      <a:pPr algn="ctr" fontAlgn="b"/>
-                      <a:endParaRPr lang="tr-TR" sz="1000" b="0" i="0" u="none" strike="noStrike">
-                        <a:solidFill>
-                          <a:schemeClr val="bg1"/>
-                        </a:solidFill>
-                        <a:effectLst/>
-                        <a:latin typeface="Arial" panose="020B0604020202020204" pitchFamily="34" charset="0"/>
-                      </a:endParaRPr>
-                    </a:p>
-                  </a:txBody>
-                  <a:tcPr marL="7846" marR="7846" marT="7846" marB="0" anchor="ctr"/>
-                </a:tc>
-                <a:extLst>
-                  <a:ext uri="{0D108BD9-81ED-4DB2-BD59-A6C34878D82A}">
-                    <a16:rowId xmlns:a16="http://schemas.microsoft.com/office/drawing/2014/main" val="3825653547"/>
-                  </a:ext>
-                </a:extLst>
-              </a:tr>
-              <a:tr h="344401">
-                <a:tc>
-                  <a:txBody>
-                    <a:bodyPr/>
-                    <a:lstStyle/>
-                    <a:p>
-                      <a:pPr algn="l" fontAlgn="b"/>
-                      <a:r>
-                        <a:rPr lang="tr-TR" sz="1000" b="1" u="none" strike="noStrike">
-                          <a:solidFill>
-                            <a:schemeClr val="bg1"/>
-                          </a:solidFill>
-                          <a:effectLst/>
-                        </a:rPr>
-                        <a:t>Proje Oluşturma ve Başlatma</a:t>
-                      </a:r>
-                      <a:endParaRPr lang="tr-TR" sz="1000" b="1" i="0" u="none" strike="noStrike">
-                        <a:solidFill>
-                          <a:schemeClr val="bg1"/>
-                        </a:solidFill>
-                        <a:effectLst/>
-                        <a:latin typeface="Arial" panose="020B0604020202020204" pitchFamily="34" charset="0"/>
-                      </a:endParaRPr>
-                    </a:p>
-                  </a:txBody>
-                  <a:tcPr marL="7846" marR="7846" marT="7846" marB="0" anchor="ctr"/>
-                </a:tc>
-                <a:tc>
-                  <a:txBody>
-                    <a:bodyPr/>
-                    <a:lstStyle/>
-                    <a:p>
-                      <a:pPr algn="ctr" fontAlgn="b"/>
-                      <a:r>
-                        <a:rPr lang="tr-TR" sz="1000" u="none" strike="noStrike">
-                          <a:solidFill>
-                            <a:schemeClr val="bg1"/>
-                          </a:solidFill>
-                          <a:effectLst/>
-                        </a:rPr>
-                        <a:t>B</a:t>
-                      </a:r>
-                      <a:endParaRPr lang="tr-TR" sz="1000" b="0" i="0" u="none" strike="noStrike">
-                        <a:solidFill>
-                          <a:schemeClr val="bg1"/>
-                        </a:solidFill>
-                        <a:effectLst/>
-                        <a:latin typeface="Arial" panose="020B0604020202020204" pitchFamily="34" charset="0"/>
-                      </a:endParaRPr>
-                    </a:p>
-                  </a:txBody>
-                  <a:tcPr marL="7846" marR="7846" marT="7846" marB="0" anchor="ctr"/>
-                </a:tc>
-                <a:tc>
-                  <a:txBody>
-                    <a:bodyPr/>
-                    <a:lstStyle/>
-                    <a:p>
-                      <a:pPr algn="ctr" fontAlgn="b"/>
-                      <a:r>
-                        <a:rPr lang="tr-TR" sz="1000" u="none" strike="noStrike">
-                          <a:solidFill>
-                            <a:schemeClr val="bg1"/>
-                          </a:solidFill>
-                          <a:effectLst/>
-                        </a:rPr>
-                        <a:t>A</a:t>
-                      </a:r>
-                      <a:endParaRPr lang="tr-TR" sz="1000" b="0" i="0" u="none" strike="noStrike">
-                        <a:solidFill>
-                          <a:schemeClr val="bg1"/>
-                        </a:solidFill>
-                        <a:effectLst/>
-                        <a:latin typeface="Arial" panose="020B0604020202020204" pitchFamily="34" charset="0"/>
-                      </a:endParaRPr>
-                    </a:p>
-                  </a:txBody>
-                  <a:tcPr marL="7846" marR="7846" marT="7846" marB="0" anchor="ctr"/>
-                </a:tc>
-                <a:tc>
-                  <a:txBody>
-                    <a:bodyPr/>
-                    <a:lstStyle/>
-                    <a:p>
-                      <a:pPr algn="ctr" fontAlgn="b"/>
-                      <a:r>
-                        <a:rPr lang="tr-TR" sz="1000" u="none" strike="noStrike">
-                          <a:solidFill>
-                            <a:schemeClr val="bg1"/>
-                          </a:solidFill>
-                          <a:effectLst/>
-                        </a:rPr>
-                        <a:t>8</a:t>
-                      </a:r>
-                      <a:endParaRPr lang="tr-TR" sz="1000" b="0" i="0" u="none" strike="noStrike">
-                        <a:solidFill>
-                          <a:schemeClr val="bg1"/>
-                        </a:solidFill>
-                        <a:effectLst/>
-                        <a:latin typeface="Arial" panose="020B0604020202020204" pitchFamily="34" charset="0"/>
-                      </a:endParaRPr>
-                    </a:p>
-                  </a:txBody>
-                  <a:tcPr marL="7846" marR="7846" marT="7846" marB="0" anchor="ctr"/>
-                </a:tc>
-                <a:tc>
-                  <a:txBody>
-                    <a:bodyPr/>
-                    <a:lstStyle/>
-                    <a:p>
-                      <a:pPr algn="ctr" fontAlgn="b"/>
-                      <a:endParaRPr lang="tr-TR" sz="1000" b="0" i="0" u="none" strike="noStrike">
-                        <a:solidFill>
-                          <a:schemeClr val="bg1"/>
-                        </a:solidFill>
-                        <a:effectLst/>
-                        <a:latin typeface="Arial" panose="020B0604020202020204" pitchFamily="34" charset="0"/>
-                      </a:endParaRPr>
-                    </a:p>
-                  </a:txBody>
-                  <a:tcPr marL="7846" marR="7846" marT="7846" marB="0" anchor="ctr"/>
-                </a:tc>
-                <a:tc>
-                  <a:txBody>
-                    <a:bodyPr/>
-                    <a:lstStyle/>
-                    <a:p>
-                      <a:pPr algn="ctr" fontAlgn="b"/>
-                      <a:endParaRPr lang="tr-TR" sz="1000" b="0" i="0" u="none" strike="noStrike">
-                        <a:solidFill>
-                          <a:schemeClr val="bg1"/>
-                        </a:solidFill>
-                        <a:effectLst/>
-                        <a:latin typeface="Arial" panose="020B0604020202020204" pitchFamily="34" charset="0"/>
-                      </a:endParaRPr>
-                    </a:p>
-                  </a:txBody>
-                  <a:tcPr marL="7846" marR="7846" marT="7846" marB="0" anchor="ctr"/>
-                </a:tc>
-                <a:extLst>
-                  <a:ext uri="{0D108BD9-81ED-4DB2-BD59-A6C34878D82A}">
-                    <a16:rowId xmlns:a16="http://schemas.microsoft.com/office/drawing/2014/main" val="336123835"/>
-                  </a:ext>
-                </a:extLst>
-              </a:tr>
-              <a:tr h="252001">
-                <a:tc>
-                  <a:txBody>
-                    <a:bodyPr/>
-                    <a:lstStyle/>
-                    <a:p>
-                      <a:pPr algn="l" fontAlgn="b"/>
-                      <a:r>
-                        <a:rPr lang="tr-TR" sz="1000" b="1" u="none" strike="noStrike">
-                          <a:solidFill>
-                            <a:schemeClr val="bg1"/>
-                          </a:solidFill>
-                          <a:effectLst/>
-                        </a:rPr>
-                        <a:t>İçerik Oluşturma</a:t>
-                      </a:r>
-                      <a:endParaRPr lang="tr-TR" sz="1000" b="1" i="0" u="none" strike="noStrike">
-                        <a:solidFill>
-                          <a:schemeClr val="bg1"/>
-                        </a:solidFill>
-                        <a:effectLst/>
-                        <a:latin typeface="Arial" panose="020B0604020202020204" pitchFamily="34" charset="0"/>
-                      </a:endParaRPr>
-                    </a:p>
-                  </a:txBody>
-                  <a:tcPr marL="7846" marR="7846" marT="7846" marB="0" anchor="ctr"/>
-                </a:tc>
-                <a:tc>
-                  <a:txBody>
-                    <a:bodyPr/>
-                    <a:lstStyle/>
-                    <a:p>
-                      <a:pPr algn="ctr" fontAlgn="b"/>
-                      <a:r>
-                        <a:rPr lang="tr-TR" sz="1000" u="none" strike="noStrike">
-                          <a:solidFill>
-                            <a:schemeClr val="bg1"/>
-                          </a:solidFill>
-                          <a:effectLst/>
-                        </a:rPr>
-                        <a:t>C</a:t>
-                      </a:r>
-                      <a:endParaRPr lang="tr-TR" sz="1000" b="0" i="0" u="none" strike="noStrike">
-                        <a:solidFill>
-                          <a:schemeClr val="bg1"/>
-                        </a:solidFill>
-                        <a:effectLst/>
-                        <a:latin typeface="Arial" panose="020B0604020202020204" pitchFamily="34" charset="0"/>
-                      </a:endParaRPr>
-                    </a:p>
-                  </a:txBody>
-                  <a:tcPr marL="7846" marR="7846" marT="7846" marB="0" anchor="ctr"/>
-                </a:tc>
-                <a:tc>
-                  <a:txBody>
-                    <a:bodyPr/>
-                    <a:lstStyle/>
-                    <a:p>
-                      <a:pPr algn="ctr" fontAlgn="b"/>
-                      <a:r>
-                        <a:rPr lang="tr-TR" sz="1000" u="none" strike="noStrike">
-                          <a:solidFill>
-                            <a:schemeClr val="bg1"/>
-                          </a:solidFill>
-                          <a:effectLst/>
-                        </a:rPr>
-                        <a:t>B</a:t>
-                      </a:r>
-                      <a:endParaRPr lang="tr-TR" sz="1000" b="0" i="0" u="none" strike="noStrike">
-                        <a:solidFill>
-                          <a:schemeClr val="bg1"/>
-                        </a:solidFill>
-                        <a:effectLst/>
-                        <a:latin typeface="Arial" panose="020B0604020202020204" pitchFamily="34" charset="0"/>
-                      </a:endParaRPr>
-                    </a:p>
-                  </a:txBody>
-                  <a:tcPr marL="7846" marR="7846" marT="7846" marB="0" anchor="ctr"/>
-                </a:tc>
-                <a:tc>
-                  <a:txBody>
-                    <a:bodyPr/>
-                    <a:lstStyle/>
-                    <a:p>
-                      <a:pPr algn="ctr" fontAlgn="b"/>
-                      <a:r>
-                        <a:rPr lang="tr-TR" sz="1000" u="none" strike="noStrike">
-                          <a:solidFill>
-                            <a:schemeClr val="bg1"/>
-                          </a:solidFill>
-                          <a:effectLst/>
-                        </a:rPr>
-                        <a:t>12</a:t>
-                      </a:r>
-                      <a:endParaRPr lang="tr-TR" sz="1000" b="0" i="0" u="none" strike="noStrike">
-                        <a:solidFill>
-                          <a:schemeClr val="bg1"/>
-                        </a:solidFill>
-                        <a:effectLst/>
-                        <a:latin typeface="Arial" panose="020B0604020202020204" pitchFamily="34" charset="0"/>
-                      </a:endParaRPr>
-                    </a:p>
-                  </a:txBody>
-                  <a:tcPr marL="7846" marR="7846" marT="7846" marB="0" anchor="ctr"/>
-                </a:tc>
-                <a:tc>
-                  <a:txBody>
-                    <a:bodyPr/>
-                    <a:lstStyle/>
-                    <a:p>
-                      <a:pPr algn="ctr" fontAlgn="b"/>
-                      <a:endParaRPr lang="tr-TR" sz="1000" b="0" i="0" u="none" strike="noStrike">
-                        <a:solidFill>
-                          <a:schemeClr val="bg1"/>
-                        </a:solidFill>
-                        <a:effectLst/>
-                        <a:latin typeface="Arial" panose="020B0604020202020204" pitchFamily="34" charset="0"/>
-                      </a:endParaRPr>
-                    </a:p>
-                  </a:txBody>
-                  <a:tcPr marL="7846" marR="7846" marT="7846" marB="0" anchor="ctr"/>
-                </a:tc>
-                <a:tc>
-                  <a:txBody>
-                    <a:bodyPr/>
-                    <a:lstStyle/>
-                    <a:p>
-                      <a:pPr algn="ctr" fontAlgn="b"/>
-                      <a:endParaRPr lang="tr-TR" sz="1000" b="0" i="0" u="none" strike="noStrike">
-                        <a:solidFill>
-                          <a:schemeClr val="bg1"/>
-                        </a:solidFill>
-                        <a:effectLst/>
-                        <a:latin typeface="Arial" panose="020B0604020202020204" pitchFamily="34" charset="0"/>
-                      </a:endParaRPr>
-                    </a:p>
-                  </a:txBody>
-                  <a:tcPr marL="7846" marR="7846" marT="7846" marB="0" anchor="ctr"/>
-                </a:tc>
-                <a:extLst>
-                  <a:ext uri="{0D108BD9-81ED-4DB2-BD59-A6C34878D82A}">
-                    <a16:rowId xmlns:a16="http://schemas.microsoft.com/office/drawing/2014/main" val="2471523744"/>
-                  </a:ext>
-                </a:extLst>
-              </a:tr>
-              <a:tr h="252001">
-                <a:tc>
-                  <a:txBody>
-                    <a:bodyPr/>
-                    <a:lstStyle/>
-                    <a:p>
-                      <a:pPr algn="l" fontAlgn="b"/>
-                      <a:r>
-                        <a:rPr lang="tr-TR" sz="1000" b="1" u="none" strike="noStrike">
-                          <a:solidFill>
-                            <a:schemeClr val="bg1"/>
-                          </a:solidFill>
-                          <a:effectLst/>
-                        </a:rPr>
-                        <a:t>Proje Performansı/İzleme</a:t>
-                      </a:r>
-                      <a:endParaRPr lang="tr-TR" sz="1000" b="1" i="0" u="none" strike="noStrike">
-                        <a:solidFill>
-                          <a:schemeClr val="bg1"/>
-                        </a:solidFill>
-                        <a:effectLst/>
-                        <a:latin typeface="Arial" panose="020B0604020202020204" pitchFamily="34" charset="0"/>
-                      </a:endParaRPr>
-                    </a:p>
-                  </a:txBody>
-                  <a:tcPr marL="7846" marR="7846" marT="7846" marB="0" anchor="ctr"/>
-                </a:tc>
-                <a:tc>
-                  <a:txBody>
-                    <a:bodyPr/>
-                    <a:lstStyle/>
-                    <a:p>
-                      <a:pPr algn="ctr" fontAlgn="b"/>
-                      <a:r>
-                        <a:rPr lang="tr-TR" sz="1000" u="none" strike="noStrike">
-                          <a:solidFill>
-                            <a:schemeClr val="bg1"/>
-                          </a:solidFill>
-                          <a:effectLst/>
-                        </a:rPr>
-                        <a:t>D</a:t>
-                      </a:r>
-                      <a:endParaRPr lang="tr-TR" sz="1000" b="0" i="0" u="none" strike="noStrike">
-                        <a:solidFill>
-                          <a:schemeClr val="bg1"/>
-                        </a:solidFill>
-                        <a:effectLst/>
-                        <a:latin typeface="Arial" panose="020B0604020202020204" pitchFamily="34" charset="0"/>
-                      </a:endParaRPr>
-                    </a:p>
-                  </a:txBody>
-                  <a:tcPr marL="7846" marR="7846" marT="7846" marB="0" anchor="ctr"/>
-                </a:tc>
-                <a:tc>
-                  <a:txBody>
-                    <a:bodyPr/>
-                    <a:lstStyle/>
-                    <a:p>
-                      <a:pPr algn="ctr" fontAlgn="b"/>
-                      <a:r>
-                        <a:rPr lang="tr-TR" sz="1000" u="none" strike="noStrike">
-                          <a:solidFill>
-                            <a:schemeClr val="bg1"/>
-                          </a:solidFill>
-                          <a:effectLst/>
-                        </a:rPr>
-                        <a:t>B</a:t>
-                      </a:r>
-                      <a:endParaRPr lang="tr-TR" sz="1000" b="0" i="0" u="none" strike="noStrike">
-                        <a:solidFill>
-                          <a:schemeClr val="bg1"/>
-                        </a:solidFill>
-                        <a:effectLst/>
-                        <a:latin typeface="Arial" panose="020B0604020202020204" pitchFamily="34" charset="0"/>
-                      </a:endParaRPr>
-                    </a:p>
-                  </a:txBody>
-                  <a:tcPr marL="7846" marR="7846" marT="7846" marB="0" anchor="ctr"/>
-                </a:tc>
-                <a:tc>
-                  <a:txBody>
-                    <a:bodyPr/>
-                    <a:lstStyle/>
-                    <a:p>
-                      <a:pPr algn="ctr" fontAlgn="b"/>
-                      <a:r>
-                        <a:rPr lang="tr-TR" sz="1000" u="none" strike="noStrike">
-                          <a:solidFill>
-                            <a:schemeClr val="bg1"/>
-                          </a:solidFill>
-                          <a:effectLst/>
-                        </a:rPr>
-                        <a:t>25</a:t>
-                      </a:r>
-                      <a:endParaRPr lang="tr-TR" sz="1000" b="0" i="0" u="none" strike="noStrike">
-                        <a:solidFill>
-                          <a:schemeClr val="bg1"/>
-                        </a:solidFill>
-                        <a:effectLst/>
-                        <a:latin typeface="Arial" panose="020B0604020202020204" pitchFamily="34" charset="0"/>
-                      </a:endParaRPr>
-                    </a:p>
-                  </a:txBody>
-                  <a:tcPr marL="7846" marR="7846" marT="7846" marB="0" anchor="ctr"/>
-                </a:tc>
-                <a:tc>
-                  <a:txBody>
-                    <a:bodyPr/>
-                    <a:lstStyle/>
-                    <a:p>
-                      <a:pPr algn="ctr" fontAlgn="b"/>
-                      <a:endParaRPr lang="tr-TR" sz="1000" b="0" i="0" u="none" strike="noStrike">
-                        <a:solidFill>
-                          <a:schemeClr val="bg1"/>
-                        </a:solidFill>
-                        <a:effectLst/>
-                        <a:latin typeface="Arial" panose="020B0604020202020204" pitchFamily="34" charset="0"/>
-                      </a:endParaRPr>
-                    </a:p>
-                  </a:txBody>
-                  <a:tcPr marL="7846" marR="7846" marT="7846" marB="0" anchor="ctr"/>
-                </a:tc>
-                <a:tc>
-                  <a:txBody>
-                    <a:bodyPr/>
-                    <a:lstStyle/>
-                    <a:p>
-                      <a:pPr algn="ctr" fontAlgn="b"/>
-                      <a:endParaRPr lang="tr-TR" sz="1000" b="0" i="0" u="none" strike="noStrike">
-                        <a:solidFill>
-                          <a:schemeClr val="bg1"/>
-                        </a:solidFill>
-                        <a:effectLst/>
-                        <a:latin typeface="Arial" panose="020B0604020202020204" pitchFamily="34" charset="0"/>
-                      </a:endParaRPr>
-                    </a:p>
-                  </a:txBody>
-                  <a:tcPr marL="7846" marR="7846" marT="7846" marB="0" anchor="ctr"/>
-                </a:tc>
-                <a:extLst>
-                  <a:ext uri="{0D108BD9-81ED-4DB2-BD59-A6C34878D82A}">
-                    <a16:rowId xmlns:a16="http://schemas.microsoft.com/office/drawing/2014/main" val="3594331512"/>
-                  </a:ext>
-                </a:extLst>
-              </a:tr>
-              <a:tr h="252001">
-                <a:tc>
-                  <a:txBody>
-                    <a:bodyPr/>
-                    <a:lstStyle/>
-                    <a:p>
-                      <a:pPr algn="l" fontAlgn="b"/>
-                      <a:r>
-                        <a:rPr lang="tr-TR" sz="1000" b="1" u="none" strike="noStrike">
-                          <a:solidFill>
-                            <a:schemeClr val="bg1"/>
-                          </a:solidFill>
-                          <a:effectLst/>
-                        </a:rPr>
-                        <a:t>Web Sitesinin Kodlanmadı</a:t>
-                      </a:r>
-                      <a:endParaRPr lang="tr-TR" sz="1000" b="1" i="0" u="none" strike="noStrike">
-                        <a:solidFill>
-                          <a:schemeClr val="bg1"/>
-                        </a:solidFill>
-                        <a:effectLst/>
-                        <a:latin typeface="Arial" panose="020B0604020202020204" pitchFamily="34" charset="0"/>
-                      </a:endParaRPr>
-                    </a:p>
-                  </a:txBody>
-                  <a:tcPr marL="7846" marR="7846" marT="7846" marB="0" anchor="ctr"/>
-                </a:tc>
-                <a:tc>
-                  <a:txBody>
-                    <a:bodyPr/>
-                    <a:lstStyle/>
-                    <a:p>
-                      <a:pPr algn="ctr" fontAlgn="b"/>
-                      <a:r>
-                        <a:rPr lang="tr-TR" sz="1000" u="none" strike="noStrike">
-                          <a:solidFill>
-                            <a:schemeClr val="bg1"/>
-                          </a:solidFill>
-                          <a:effectLst/>
-                        </a:rPr>
-                        <a:t>E</a:t>
-                      </a:r>
-                      <a:endParaRPr lang="tr-TR" sz="1000" b="0" i="0" u="none" strike="noStrike">
-                        <a:solidFill>
-                          <a:schemeClr val="bg1"/>
-                        </a:solidFill>
-                        <a:effectLst/>
-                        <a:latin typeface="Arial" panose="020B0604020202020204" pitchFamily="34" charset="0"/>
-                      </a:endParaRPr>
-                    </a:p>
-                  </a:txBody>
-                  <a:tcPr marL="7846" marR="7846" marT="7846" marB="0" anchor="ctr"/>
-                </a:tc>
-                <a:tc>
-                  <a:txBody>
-                    <a:bodyPr/>
-                    <a:lstStyle/>
-                    <a:p>
-                      <a:pPr algn="ctr" fontAlgn="b"/>
-                      <a:r>
-                        <a:rPr lang="tr-TR" sz="1000" u="none" strike="noStrike">
-                          <a:solidFill>
-                            <a:schemeClr val="bg1"/>
-                          </a:solidFill>
-                          <a:effectLst/>
-                        </a:rPr>
-                        <a:t>C</a:t>
-                      </a:r>
-                      <a:endParaRPr lang="tr-TR" sz="1000" b="0" i="0" u="none" strike="noStrike">
-                        <a:solidFill>
-                          <a:schemeClr val="bg1"/>
-                        </a:solidFill>
-                        <a:effectLst/>
-                        <a:latin typeface="Arial" panose="020B0604020202020204" pitchFamily="34" charset="0"/>
-                      </a:endParaRPr>
-                    </a:p>
-                  </a:txBody>
-                  <a:tcPr marL="7846" marR="7846" marT="7846" marB="0" anchor="ctr"/>
-                </a:tc>
-                <a:tc>
-                  <a:txBody>
-                    <a:bodyPr/>
-                    <a:lstStyle/>
-                    <a:p>
-                      <a:pPr algn="ctr" fontAlgn="b"/>
-                      <a:r>
-                        <a:rPr lang="tr-TR" sz="1000" u="none" strike="noStrike">
-                          <a:solidFill>
-                            <a:schemeClr val="bg1"/>
-                          </a:solidFill>
-                          <a:effectLst/>
-                        </a:rPr>
-                        <a:t>8</a:t>
-                      </a:r>
-                      <a:endParaRPr lang="tr-TR" sz="1000" b="0" i="0" u="none" strike="noStrike">
-                        <a:solidFill>
-                          <a:schemeClr val="bg1"/>
-                        </a:solidFill>
-                        <a:effectLst/>
-                        <a:latin typeface="Arial" panose="020B0604020202020204" pitchFamily="34" charset="0"/>
-                      </a:endParaRPr>
-                    </a:p>
-                  </a:txBody>
-                  <a:tcPr marL="7846" marR="7846" marT="7846" marB="0" anchor="ctr"/>
-                </a:tc>
-                <a:tc>
-                  <a:txBody>
-                    <a:bodyPr/>
-                    <a:lstStyle/>
-                    <a:p>
-                      <a:pPr algn="ctr" fontAlgn="b"/>
-                      <a:r>
-                        <a:rPr lang="tr-TR" sz="1000" u="none" strike="noStrike">
-                          <a:solidFill>
-                            <a:schemeClr val="bg1"/>
-                          </a:solidFill>
-                          <a:effectLst/>
-                        </a:rPr>
-                        <a:t>2</a:t>
-                      </a:r>
-                      <a:endParaRPr lang="tr-TR" sz="1000" b="0" i="0" u="none" strike="noStrike">
-                        <a:solidFill>
-                          <a:schemeClr val="bg1"/>
-                        </a:solidFill>
-                        <a:effectLst/>
-                        <a:latin typeface="Arial" panose="020B0604020202020204" pitchFamily="34" charset="0"/>
-                      </a:endParaRPr>
-                    </a:p>
-                  </a:txBody>
-                  <a:tcPr marL="7846" marR="7846" marT="7846" marB="0" anchor="ctr"/>
-                </a:tc>
-                <a:tc>
-                  <a:txBody>
-                    <a:bodyPr/>
-                    <a:lstStyle/>
-                    <a:p>
-                      <a:pPr algn="ctr" fontAlgn="b"/>
-                      <a:r>
-                        <a:rPr lang="tr-TR" sz="1000" u="none" strike="noStrike">
-                          <a:solidFill>
-                            <a:schemeClr val="bg1"/>
-                          </a:solidFill>
-                          <a:effectLst/>
-                        </a:rPr>
-                        <a:t>2</a:t>
-                      </a:r>
-                      <a:endParaRPr lang="tr-TR" sz="1000" b="0" i="0" u="none" strike="noStrike">
-                        <a:solidFill>
-                          <a:schemeClr val="bg1"/>
-                        </a:solidFill>
-                        <a:effectLst/>
-                        <a:latin typeface="Arial" panose="020B0604020202020204" pitchFamily="34" charset="0"/>
-                      </a:endParaRPr>
-                    </a:p>
-                  </a:txBody>
-                  <a:tcPr marL="7846" marR="7846" marT="7846" marB="0" anchor="ctr"/>
-                </a:tc>
-                <a:extLst>
-                  <a:ext uri="{0D108BD9-81ED-4DB2-BD59-A6C34878D82A}">
-                    <a16:rowId xmlns:a16="http://schemas.microsoft.com/office/drawing/2014/main" val="189053729"/>
-                  </a:ext>
-                </a:extLst>
-              </a:tr>
-              <a:tr h="252001">
-                <a:tc>
-                  <a:txBody>
-                    <a:bodyPr/>
-                    <a:lstStyle/>
-                    <a:p>
-                      <a:pPr algn="l" fontAlgn="b"/>
-                      <a:r>
-                        <a:rPr lang="tr-TR" sz="1000" b="1" u="none" strike="noStrike">
-                          <a:solidFill>
-                            <a:schemeClr val="bg1"/>
-                          </a:solidFill>
-                          <a:effectLst/>
-                        </a:rPr>
-                        <a:t>Teknik Geliştirme</a:t>
-                      </a:r>
-                      <a:endParaRPr lang="tr-TR" sz="1000" b="1" i="0" u="none" strike="noStrike">
-                        <a:solidFill>
-                          <a:schemeClr val="bg1"/>
-                        </a:solidFill>
-                        <a:effectLst/>
-                        <a:latin typeface="Arial" panose="020B0604020202020204" pitchFamily="34" charset="0"/>
-                      </a:endParaRPr>
-                    </a:p>
-                  </a:txBody>
-                  <a:tcPr marL="7846" marR="7846" marT="7846" marB="0" anchor="ctr"/>
-                </a:tc>
-                <a:tc>
-                  <a:txBody>
-                    <a:bodyPr/>
-                    <a:lstStyle/>
-                    <a:p>
-                      <a:pPr algn="ctr" fontAlgn="b"/>
-                      <a:r>
-                        <a:rPr lang="tr-TR" sz="1000" u="none" strike="noStrike">
-                          <a:solidFill>
-                            <a:schemeClr val="bg1"/>
-                          </a:solidFill>
-                          <a:effectLst/>
-                        </a:rPr>
-                        <a:t>F</a:t>
-                      </a:r>
-                      <a:endParaRPr lang="tr-TR" sz="1000" b="0" i="0" u="none" strike="noStrike">
-                        <a:solidFill>
-                          <a:schemeClr val="bg1"/>
-                        </a:solidFill>
-                        <a:effectLst/>
-                        <a:latin typeface="Arial" panose="020B0604020202020204" pitchFamily="34" charset="0"/>
-                      </a:endParaRPr>
-                    </a:p>
-                  </a:txBody>
-                  <a:tcPr marL="7846" marR="7846" marT="7846" marB="0" anchor="ctr"/>
-                </a:tc>
-                <a:tc>
-                  <a:txBody>
-                    <a:bodyPr/>
-                    <a:lstStyle/>
-                    <a:p>
-                      <a:pPr algn="ctr" fontAlgn="b"/>
-                      <a:r>
-                        <a:rPr lang="tr-TR" sz="1000" u="none" strike="noStrike">
-                          <a:solidFill>
-                            <a:schemeClr val="bg1"/>
-                          </a:solidFill>
-                          <a:effectLst/>
-                        </a:rPr>
-                        <a:t>C</a:t>
-                      </a:r>
-                      <a:endParaRPr lang="tr-TR" sz="1000" b="0" i="0" u="none" strike="noStrike">
-                        <a:solidFill>
-                          <a:schemeClr val="bg1"/>
-                        </a:solidFill>
-                        <a:effectLst/>
-                        <a:latin typeface="Arial" panose="020B0604020202020204" pitchFamily="34" charset="0"/>
-                      </a:endParaRPr>
-                    </a:p>
-                  </a:txBody>
-                  <a:tcPr marL="7846" marR="7846" marT="7846" marB="0" anchor="ctr"/>
-                </a:tc>
-                <a:tc>
-                  <a:txBody>
-                    <a:bodyPr/>
-                    <a:lstStyle/>
-                    <a:p>
-                      <a:pPr algn="ctr" fontAlgn="b"/>
-                      <a:r>
-                        <a:rPr lang="tr-TR" sz="1000" u="none" strike="noStrike">
-                          <a:solidFill>
-                            <a:schemeClr val="bg1"/>
-                          </a:solidFill>
-                          <a:effectLst/>
-                        </a:rPr>
-                        <a:t>10</a:t>
-                      </a:r>
-                      <a:endParaRPr lang="tr-TR" sz="1000" b="0" i="0" u="none" strike="noStrike">
-                        <a:solidFill>
-                          <a:schemeClr val="bg1"/>
-                        </a:solidFill>
-                        <a:effectLst/>
-                        <a:latin typeface="Arial" panose="020B0604020202020204" pitchFamily="34" charset="0"/>
-                      </a:endParaRPr>
-                    </a:p>
-                  </a:txBody>
-                  <a:tcPr marL="7846" marR="7846" marT="7846" marB="0" anchor="ctr"/>
-                </a:tc>
-                <a:tc>
-                  <a:txBody>
-                    <a:bodyPr/>
-                    <a:lstStyle/>
-                    <a:p>
-                      <a:pPr algn="ctr" fontAlgn="b"/>
-                      <a:endParaRPr lang="tr-TR" sz="1000" b="0" i="0" u="none" strike="noStrike">
-                        <a:solidFill>
-                          <a:schemeClr val="bg1"/>
-                        </a:solidFill>
-                        <a:effectLst/>
-                        <a:latin typeface="Arial" panose="020B0604020202020204" pitchFamily="34" charset="0"/>
-                      </a:endParaRPr>
-                    </a:p>
-                  </a:txBody>
-                  <a:tcPr marL="7846" marR="7846" marT="7846" marB="0" anchor="ctr"/>
-                </a:tc>
-                <a:tc>
-                  <a:txBody>
-                    <a:bodyPr/>
-                    <a:lstStyle/>
-                    <a:p>
-                      <a:pPr algn="ctr" fontAlgn="b"/>
-                      <a:endParaRPr lang="tr-TR" sz="1000" b="0" i="0" u="none" strike="noStrike">
-                        <a:solidFill>
-                          <a:schemeClr val="bg1"/>
-                        </a:solidFill>
-                        <a:effectLst/>
-                        <a:latin typeface="Arial" panose="020B0604020202020204" pitchFamily="34" charset="0"/>
-                      </a:endParaRPr>
-                    </a:p>
-                  </a:txBody>
-                  <a:tcPr marL="7846" marR="7846" marT="7846" marB="0" anchor="ctr"/>
-                </a:tc>
-                <a:extLst>
-                  <a:ext uri="{0D108BD9-81ED-4DB2-BD59-A6C34878D82A}">
-                    <a16:rowId xmlns:a16="http://schemas.microsoft.com/office/drawing/2014/main" val="2598240519"/>
-                  </a:ext>
-                </a:extLst>
-              </a:tr>
-              <a:tr h="252001">
-                <a:tc>
-                  <a:txBody>
-                    <a:bodyPr/>
-                    <a:lstStyle/>
-                    <a:p>
-                      <a:pPr algn="l" fontAlgn="b"/>
-                      <a:r>
-                        <a:rPr lang="tr-TR" sz="1000" b="1" u="none" strike="noStrike">
-                          <a:solidFill>
-                            <a:schemeClr val="bg1"/>
-                          </a:solidFill>
-                          <a:effectLst/>
-                        </a:rPr>
-                        <a:t>Yayınlama ve Tanıtım </a:t>
-                      </a:r>
-                      <a:endParaRPr lang="tr-TR" sz="1000" b="1" i="0" u="none" strike="noStrike">
-                        <a:solidFill>
-                          <a:schemeClr val="bg1"/>
-                        </a:solidFill>
-                        <a:effectLst/>
-                        <a:latin typeface="Arial" panose="020B0604020202020204" pitchFamily="34" charset="0"/>
-                      </a:endParaRPr>
-                    </a:p>
-                  </a:txBody>
-                  <a:tcPr marL="7846" marR="7846" marT="7846" marB="0" anchor="ctr"/>
-                </a:tc>
-                <a:tc>
-                  <a:txBody>
-                    <a:bodyPr/>
-                    <a:lstStyle/>
-                    <a:p>
-                      <a:pPr algn="ctr" fontAlgn="b"/>
-                      <a:r>
-                        <a:rPr lang="tr-TR" sz="1000" u="none" strike="noStrike">
-                          <a:solidFill>
-                            <a:schemeClr val="bg1"/>
-                          </a:solidFill>
-                          <a:effectLst/>
-                        </a:rPr>
-                        <a:t>G</a:t>
-                      </a:r>
-                      <a:endParaRPr lang="tr-TR" sz="1000" b="0" i="0" u="none" strike="noStrike">
-                        <a:solidFill>
-                          <a:schemeClr val="bg1"/>
-                        </a:solidFill>
-                        <a:effectLst/>
-                        <a:latin typeface="Arial" panose="020B0604020202020204" pitchFamily="34" charset="0"/>
-                      </a:endParaRPr>
-                    </a:p>
-                  </a:txBody>
-                  <a:tcPr marL="7846" marR="7846" marT="7846" marB="0" anchor="ctr"/>
-                </a:tc>
-                <a:tc>
-                  <a:txBody>
-                    <a:bodyPr/>
-                    <a:lstStyle/>
-                    <a:p>
-                      <a:pPr algn="ctr" fontAlgn="b"/>
-                      <a:r>
-                        <a:rPr lang="tr-TR" sz="1000" u="none" strike="noStrike">
-                          <a:solidFill>
-                            <a:schemeClr val="bg1"/>
-                          </a:solidFill>
-                          <a:effectLst/>
-                        </a:rPr>
-                        <a:t>E</a:t>
-                      </a:r>
-                      <a:endParaRPr lang="tr-TR" sz="1000" b="0" i="0" u="none" strike="noStrike">
-                        <a:solidFill>
-                          <a:schemeClr val="bg1"/>
-                        </a:solidFill>
-                        <a:effectLst/>
-                        <a:latin typeface="Arial" panose="020B0604020202020204" pitchFamily="34" charset="0"/>
-                      </a:endParaRPr>
-                    </a:p>
-                  </a:txBody>
-                  <a:tcPr marL="7846" marR="7846" marT="7846" marB="0" anchor="ctr"/>
-                </a:tc>
-                <a:tc>
-                  <a:txBody>
-                    <a:bodyPr/>
-                    <a:lstStyle/>
-                    <a:p>
-                      <a:pPr algn="ctr" fontAlgn="b"/>
-                      <a:r>
-                        <a:rPr lang="tr-TR" sz="1000" u="none" strike="noStrike">
-                          <a:solidFill>
-                            <a:schemeClr val="bg1"/>
-                          </a:solidFill>
-                          <a:effectLst/>
-                        </a:rPr>
-                        <a:t>3</a:t>
-                      </a:r>
-                      <a:endParaRPr lang="tr-TR" sz="1000" b="0" i="0" u="none" strike="noStrike">
-                        <a:solidFill>
-                          <a:schemeClr val="bg1"/>
-                        </a:solidFill>
-                        <a:effectLst/>
-                        <a:latin typeface="Arial" panose="020B0604020202020204" pitchFamily="34" charset="0"/>
-                      </a:endParaRPr>
-                    </a:p>
-                  </a:txBody>
-                  <a:tcPr marL="7846" marR="7846" marT="7846" marB="0" anchor="ctr"/>
-                </a:tc>
-                <a:tc>
-                  <a:txBody>
-                    <a:bodyPr/>
-                    <a:lstStyle/>
-                    <a:p>
-                      <a:pPr algn="ctr" fontAlgn="b"/>
-                      <a:endParaRPr lang="tr-TR" sz="1000" b="0" i="0" u="none" strike="noStrike">
-                        <a:solidFill>
-                          <a:schemeClr val="bg1"/>
-                        </a:solidFill>
-                        <a:effectLst/>
-                        <a:latin typeface="Arial" panose="020B0604020202020204" pitchFamily="34" charset="0"/>
-                      </a:endParaRPr>
-                    </a:p>
-                  </a:txBody>
-                  <a:tcPr marL="7846" marR="7846" marT="7846" marB="0" anchor="ctr"/>
-                </a:tc>
-                <a:tc>
-                  <a:txBody>
-                    <a:bodyPr/>
-                    <a:lstStyle/>
-                    <a:p>
-                      <a:pPr algn="ctr" fontAlgn="b"/>
-                      <a:endParaRPr lang="tr-TR" sz="1000" b="0" i="0" u="none" strike="noStrike" dirty="0">
-                        <a:solidFill>
-                          <a:schemeClr val="bg1"/>
-                        </a:solidFill>
-                        <a:effectLst/>
-                        <a:latin typeface="Arial" panose="020B0604020202020204" pitchFamily="34" charset="0"/>
-                      </a:endParaRPr>
-                    </a:p>
-                  </a:txBody>
-                  <a:tcPr marL="7846" marR="7846" marT="7846" marB="0" anchor="ctr"/>
-                </a:tc>
-                <a:extLst>
-                  <a:ext uri="{0D108BD9-81ED-4DB2-BD59-A6C34878D82A}">
-                    <a16:rowId xmlns:a16="http://schemas.microsoft.com/office/drawing/2014/main" val="714306333"/>
-                  </a:ext>
-                </a:extLst>
-              </a:tr>
-            </a:tbl>
-          </a:graphicData>
-        </a:graphic>
-      </p:graphicFrame>
-      <p:sp>
-        <p:nvSpPr>
-          <p:cNvPr id="29" name="Metin kutusu 28">
-            <a:extLst>
-              <a:ext uri="{FF2B5EF4-FFF2-40B4-BE49-F238E27FC236}">
-                <a16:creationId xmlns:a16="http://schemas.microsoft.com/office/drawing/2014/main" id="{79F57D55-0ADE-158F-1418-949B647043A3}"/>
-              </a:ext>
-            </a:extLst>
-          </p:cNvPr>
-          <p:cNvSpPr txBox="1"/>
-          <p:nvPr/>
-        </p:nvSpPr>
-        <p:spPr>
-          <a:xfrm>
-            <a:off x="1817088" y="4619809"/>
-            <a:ext cx="1361440" cy="369332"/>
-          </a:xfrm>
-          <a:prstGeom prst="rect">
-            <a:avLst/>
-          </a:prstGeom>
-          <a:noFill/>
-        </p:spPr>
-        <p:txBody>
-          <a:bodyPr wrap="square" rtlCol="0">
-            <a:spAutoFit/>
-          </a:bodyPr>
-          <a:lstStyle/>
-          <a:p>
-            <a:r>
-              <a:rPr lang="en-US">
-                <a:solidFill>
-                  <a:schemeClr val="bg1"/>
-                </a:solidFill>
-              </a:rPr>
-              <a:t>A = 5</a:t>
-            </a:r>
-            <a:endParaRPr lang="tr-TR">
-              <a:solidFill>
-                <a:schemeClr val="bg1"/>
-              </a:solidFill>
-            </a:endParaRPr>
-          </a:p>
-        </p:txBody>
-      </p:sp>
-      <p:graphicFrame>
-        <p:nvGraphicFramePr>
-          <p:cNvPr id="30" name="Tablo 29">
-            <a:extLst>
-              <a:ext uri="{FF2B5EF4-FFF2-40B4-BE49-F238E27FC236}">
-                <a16:creationId xmlns:a16="http://schemas.microsoft.com/office/drawing/2014/main" id="{3A00A3D5-8B11-5237-F05C-FF1365159119}"/>
-              </a:ext>
-            </a:extLst>
-          </p:cNvPr>
-          <p:cNvGraphicFramePr>
-            <a:graphicFrameLocks noGrp="1"/>
-          </p:cNvGraphicFramePr>
-          <p:nvPr>
-            <p:extLst>
-              <p:ext uri="{D42A27DB-BD31-4B8C-83A1-F6EECF244321}">
-                <p14:modId xmlns:p14="http://schemas.microsoft.com/office/powerpoint/2010/main" val="2258938984"/>
-              </p:ext>
-            </p:extLst>
-          </p:nvPr>
-        </p:nvGraphicFramePr>
-        <p:xfrm>
-          <a:off x="1092200" y="4446552"/>
-          <a:ext cx="630080" cy="369332"/>
-        </p:xfrm>
-        <a:graphic>
-          <a:graphicData uri="http://schemas.openxmlformats.org/drawingml/2006/table">
-            <a:tbl>
-              <a:tblPr firstRow="1" bandRow="1">
-                <a:tableStyleId>{2D5ABB26-0587-4C30-8999-92F81FD0307C}</a:tableStyleId>
-              </a:tblPr>
-              <a:tblGrid>
-                <a:gridCol w="315040">
-                  <a:extLst>
-                    <a:ext uri="{9D8B030D-6E8A-4147-A177-3AD203B41FA5}">
-                      <a16:colId xmlns:a16="http://schemas.microsoft.com/office/drawing/2014/main" val="3392497328"/>
-                    </a:ext>
-                  </a:extLst>
-                </a:gridCol>
-                <a:gridCol w="315040">
-                  <a:extLst>
-                    <a:ext uri="{9D8B030D-6E8A-4147-A177-3AD203B41FA5}">
-                      <a16:colId xmlns:a16="http://schemas.microsoft.com/office/drawing/2014/main" val="414444322"/>
-                    </a:ext>
-                  </a:extLst>
-                </a:gridCol>
-              </a:tblGrid>
-              <a:tr h="369332">
-                <a:tc>
-                  <a:txBody>
-                    <a:bodyPr/>
-                    <a:lstStyle/>
-                    <a:p>
-                      <a:r>
-                        <a:rPr lang="en-US">
-                          <a:solidFill>
-                            <a:schemeClr val="bg1"/>
-                          </a:solidFill>
-                        </a:rPr>
-                        <a:t>0</a:t>
-                      </a:r>
-                      <a:endParaRPr lang="tr-TR">
-                        <a:solidFill>
-                          <a:schemeClr val="bg1"/>
-                        </a:solidFill>
-                      </a:endParaRPr>
-                    </a:p>
-                  </a:txBody>
-                  <a:tcPr>
-                    <a:lnL w="12700" cap="flat" cmpd="sng" algn="ctr">
-                      <a:solidFill>
-                        <a:schemeClr val="tx1"/>
-                      </a:solidFill>
-                      <a:prstDash val="solid"/>
-                      <a:round/>
-                      <a:headEnd type="none" w="med" len="med"/>
-                      <a:tailEnd type="none" w="med" len="med"/>
-                    </a:lnL>
-                    <a:lnR w="12700" cap="flat" cmpd="sng" algn="ctr">
-                      <a:solidFill>
-                        <a:schemeClr val="tx1"/>
-                      </a:solidFill>
-                      <a:prstDash val="solid"/>
-                      <a:round/>
-                      <a:headEnd type="none" w="med" len="med"/>
-                      <a:tailEnd type="none" w="med" len="med"/>
-                    </a:lnR>
-                    <a:lnT w="12700" cap="flat" cmpd="sng" algn="ctr">
-                      <a:solidFill>
-                        <a:schemeClr val="tx1"/>
-                      </a:solidFill>
-                      <a:prstDash val="solid"/>
-                      <a:round/>
-                      <a:headEnd type="none" w="med" len="med"/>
-                      <a:tailEnd type="none" w="med" len="med"/>
-                    </a:lnT>
-                    <a:lnB w="12700" cap="flat" cmpd="sng" algn="ctr">
-                      <a:solidFill>
-                        <a:schemeClr val="tx1"/>
-                      </a:solidFill>
-                      <a:prstDash val="solid"/>
-                      <a:round/>
-                      <a:headEnd type="none" w="med" len="med"/>
-                      <a:tailEnd type="none" w="med" len="med"/>
-                    </a:lnB>
-                  </a:tcPr>
-                </a:tc>
-                <a:tc>
-                  <a:txBody>
-                    <a:bodyPr/>
-                    <a:lstStyle/>
-                    <a:p>
-                      <a:r>
-                        <a:rPr lang="en-US">
-                          <a:solidFill>
-                            <a:schemeClr val="bg1"/>
-                          </a:solidFill>
-                        </a:rPr>
-                        <a:t>0</a:t>
-                      </a:r>
-                      <a:endParaRPr lang="tr-TR">
-                        <a:solidFill>
-                          <a:schemeClr val="bg1"/>
-                        </a:solidFill>
-                      </a:endParaRPr>
-                    </a:p>
-                  </a:txBody>
-                  <a:tcPr>
-                    <a:lnL w="12700" cap="flat" cmpd="sng" algn="ctr">
-                      <a:solidFill>
-                        <a:schemeClr val="tx1"/>
-                      </a:solidFill>
-                      <a:prstDash val="solid"/>
-                      <a:round/>
-                      <a:headEnd type="none" w="med" len="med"/>
-                      <a:tailEnd type="none" w="med" len="med"/>
-                    </a:lnL>
-                    <a:lnR w="12700" cap="flat" cmpd="sng" algn="ctr">
-                      <a:solidFill>
-                        <a:schemeClr val="tx1"/>
-                      </a:solidFill>
-                      <a:prstDash val="solid"/>
-                      <a:round/>
-                      <a:headEnd type="none" w="med" len="med"/>
-                      <a:tailEnd type="none" w="med" len="med"/>
-                    </a:lnR>
-                    <a:lnT w="12700" cap="flat" cmpd="sng" algn="ctr">
-                      <a:solidFill>
-                        <a:schemeClr val="tx1"/>
-                      </a:solidFill>
-                      <a:prstDash val="solid"/>
-                      <a:round/>
-                      <a:headEnd type="none" w="med" len="med"/>
-                      <a:tailEnd type="none" w="med" len="med"/>
-                    </a:lnT>
-                    <a:lnB w="12700" cap="flat" cmpd="sng" algn="ctr">
-                      <a:solidFill>
-                        <a:schemeClr val="tx1"/>
-                      </a:solidFill>
-                      <a:prstDash val="solid"/>
-                      <a:round/>
-                      <a:headEnd type="none" w="med" len="med"/>
-                      <a:tailEnd type="none" w="med" len="med"/>
-                    </a:lnB>
-                  </a:tcPr>
-                </a:tc>
-                <a:extLst>
-                  <a:ext uri="{0D108BD9-81ED-4DB2-BD59-A6C34878D82A}">
-                    <a16:rowId xmlns:a16="http://schemas.microsoft.com/office/drawing/2014/main" val="3293188918"/>
-                  </a:ext>
-                </a:extLst>
-              </a:tr>
-            </a:tbl>
-          </a:graphicData>
-        </a:graphic>
-      </p:graphicFrame>
-      <p:graphicFrame>
-        <p:nvGraphicFramePr>
-          <p:cNvPr id="31" name="Tablo 30">
-            <a:extLst>
-              <a:ext uri="{FF2B5EF4-FFF2-40B4-BE49-F238E27FC236}">
-                <a16:creationId xmlns:a16="http://schemas.microsoft.com/office/drawing/2014/main" id="{4D2771E6-A63D-319F-FE00-506D44293B20}"/>
-              </a:ext>
-            </a:extLst>
-          </p:cNvPr>
-          <p:cNvGraphicFramePr>
-            <a:graphicFrameLocks noGrp="1"/>
-          </p:cNvGraphicFramePr>
-          <p:nvPr>
-            <p:extLst>
-              <p:ext uri="{D42A27DB-BD31-4B8C-83A1-F6EECF244321}">
-                <p14:modId xmlns:p14="http://schemas.microsoft.com/office/powerpoint/2010/main" val="1875397898"/>
-              </p:ext>
-            </p:extLst>
-          </p:nvPr>
-        </p:nvGraphicFramePr>
-        <p:xfrm>
-          <a:off x="2702244" y="4397414"/>
-          <a:ext cx="630080" cy="369332"/>
-        </p:xfrm>
-        <a:graphic>
-          <a:graphicData uri="http://schemas.openxmlformats.org/drawingml/2006/table">
-            <a:tbl>
-              <a:tblPr firstRow="1" bandRow="1">
-                <a:tableStyleId>{2D5ABB26-0587-4C30-8999-92F81FD0307C}</a:tableStyleId>
-              </a:tblPr>
-              <a:tblGrid>
-                <a:gridCol w="315040">
-                  <a:extLst>
-                    <a:ext uri="{9D8B030D-6E8A-4147-A177-3AD203B41FA5}">
-                      <a16:colId xmlns:a16="http://schemas.microsoft.com/office/drawing/2014/main" val="3392497328"/>
-                    </a:ext>
-                  </a:extLst>
-                </a:gridCol>
-                <a:gridCol w="315040">
-                  <a:extLst>
-                    <a:ext uri="{9D8B030D-6E8A-4147-A177-3AD203B41FA5}">
-                      <a16:colId xmlns:a16="http://schemas.microsoft.com/office/drawing/2014/main" val="414444322"/>
-                    </a:ext>
-                  </a:extLst>
-                </a:gridCol>
-              </a:tblGrid>
-              <a:tr h="369332">
-                <a:tc>
-                  <a:txBody>
-                    <a:bodyPr/>
-                    <a:lstStyle/>
-                    <a:p>
-                      <a:r>
-                        <a:rPr lang="en-US">
-                          <a:solidFill>
-                            <a:schemeClr val="bg1"/>
-                          </a:solidFill>
-                        </a:rPr>
-                        <a:t>5</a:t>
-                      </a:r>
-                      <a:endParaRPr lang="tr-TR">
-                        <a:solidFill>
-                          <a:schemeClr val="bg1"/>
-                        </a:solidFill>
-                      </a:endParaRPr>
-                    </a:p>
-                  </a:txBody>
-                  <a:tcPr>
-                    <a:lnL w="12700" cap="flat" cmpd="sng" algn="ctr">
-                      <a:solidFill>
-                        <a:schemeClr val="tx1"/>
-                      </a:solidFill>
-                      <a:prstDash val="solid"/>
-                      <a:round/>
-                      <a:headEnd type="none" w="med" len="med"/>
-                      <a:tailEnd type="none" w="med" len="med"/>
-                    </a:lnL>
-                    <a:lnR w="12700" cap="flat" cmpd="sng" algn="ctr">
-                      <a:solidFill>
-                        <a:schemeClr val="tx1"/>
-                      </a:solidFill>
-                      <a:prstDash val="solid"/>
-                      <a:round/>
-                      <a:headEnd type="none" w="med" len="med"/>
-                      <a:tailEnd type="none" w="med" len="med"/>
-                    </a:lnR>
-                    <a:lnT w="12700" cap="flat" cmpd="sng" algn="ctr">
-                      <a:solidFill>
-                        <a:schemeClr val="tx1"/>
-                      </a:solidFill>
-                      <a:prstDash val="solid"/>
-                      <a:round/>
-                      <a:headEnd type="none" w="med" len="med"/>
-                      <a:tailEnd type="none" w="med" len="med"/>
-                    </a:lnT>
-                    <a:lnB w="12700" cap="flat" cmpd="sng" algn="ctr">
-                      <a:solidFill>
-                        <a:schemeClr val="tx1"/>
-                      </a:solidFill>
-                      <a:prstDash val="solid"/>
-                      <a:round/>
-                      <a:headEnd type="none" w="med" len="med"/>
-                      <a:tailEnd type="none" w="med" len="med"/>
-                    </a:lnB>
-                  </a:tcPr>
-                </a:tc>
-                <a:tc>
-                  <a:txBody>
-                    <a:bodyPr/>
-                    <a:lstStyle/>
-                    <a:p>
-                      <a:r>
-                        <a:rPr lang="en-US">
-                          <a:solidFill>
-                            <a:schemeClr val="bg1"/>
-                          </a:solidFill>
-                        </a:rPr>
-                        <a:t>5</a:t>
-                      </a:r>
-                      <a:endParaRPr lang="tr-TR">
-                        <a:solidFill>
-                          <a:schemeClr val="bg1"/>
-                        </a:solidFill>
-                      </a:endParaRPr>
-                    </a:p>
-                  </a:txBody>
-                  <a:tcPr>
-                    <a:lnL w="12700" cap="flat" cmpd="sng" algn="ctr">
-                      <a:solidFill>
-                        <a:schemeClr val="tx1"/>
-                      </a:solidFill>
-                      <a:prstDash val="solid"/>
-                      <a:round/>
-                      <a:headEnd type="none" w="med" len="med"/>
-                      <a:tailEnd type="none" w="med" len="med"/>
-                    </a:lnL>
-                    <a:lnR w="12700" cap="flat" cmpd="sng" algn="ctr">
-                      <a:solidFill>
-                        <a:schemeClr val="tx1"/>
-                      </a:solidFill>
-                      <a:prstDash val="solid"/>
-                      <a:round/>
-                      <a:headEnd type="none" w="med" len="med"/>
-                      <a:tailEnd type="none" w="med" len="med"/>
-                    </a:lnR>
-                    <a:lnT w="12700" cap="flat" cmpd="sng" algn="ctr">
-                      <a:solidFill>
-                        <a:schemeClr val="tx1"/>
-                      </a:solidFill>
-                      <a:prstDash val="solid"/>
-                      <a:round/>
-                      <a:headEnd type="none" w="med" len="med"/>
-                      <a:tailEnd type="none" w="med" len="med"/>
-                    </a:lnT>
-                    <a:lnB w="12700" cap="flat" cmpd="sng" algn="ctr">
-                      <a:solidFill>
-                        <a:schemeClr val="tx1"/>
-                      </a:solidFill>
-                      <a:prstDash val="solid"/>
-                      <a:round/>
-                      <a:headEnd type="none" w="med" len="med"/>
-                      <a:tailEnd type="none" w="med" len="med"/>
-                    </a:lnB>
-                  </a:tcPr>
-                </a:tc>
-                <a:extLst>
-                  <a:ext uri="{0D108BD9-81ED-4DB2-BD59-A6C34878D82A}">
-                    <a16:rowId xmlns:a16="http://schemas.microsoft.com/office/drawing/2014/main" val="3293188918"/>
-                  </a:ext>
-                </a:extLst>
-              </a:tr>
-            </a:tbl>
-          </a:graphicData>
-        </a:graphic>
-      </p:graphicFrame>
-      <p:graphicFrame>
-        <p:nvGraphicFramePr>
-          <p:cNvPr id="32" name="Tablo 31">
-            <a:extLst>
-              <a:ext uri="{FF2B5EF4-FFF2-40B4-BE49-F238E27FC236}">
-                <a16:creationId xmlns:a16="http://schemas.microsoft.com/office/drawing/2014/main" id="{10F3CADC-3D75-F468-E011-A8E8E0E0277B}"/>
-              </a:ext>
-            </a:extLst>
-          </p:cNvPr>
-          <p:cNvGraphicFramePr>
-            <a:graphicFrameLocks noGrp="1"/>
-          </p:cNvGraphicFramePr>
-          <p:nvPr>
-            <p:extLst>
-              <p:ext uri="{D42A27DB-BD31-4B8C-83A1-F6EECF244321}">
-                <p14:modId xmlns:p14="http://schemas.microsoft.com/office/powerpoint/2010/main" val="3316221634"/>
-              </p:ext>
-            </p:extLst>
-          </p:nvPr>
-        </p:nvGraphicFramePr>
-        <p:xfrm>
-          <a:off x="4024357" y="4397414"/>
-          <a:ext cx="934122" cy="369332"/>
-        </p:xfrm>
-        <a:graphic>
-          <a:graphicData uri="http://schemas.openxmlformats.org/drawingml/2006/table">
-            <a:tbl>
-              <a:tblPr firstRow="1" bandRow="1">
-                <a:tableStyleId>{2D5ABB26-0587-4C30-8999-92F81FD0307C}</a:tableStyleId>
-              </a:tblPr>
-              <a:tblGrid>
-                <a:gridCol w="467061">
-                  <a:extLst>
-                    <a:ext uri="{9D8B030D-6E8A-4147-A177-3AD203B41FA5}">
-                      <a16:colId xmlns:a16="http://schemas.microsoft.com/office/drawing/2014/main" val="3392497328"/>
-                    </a:ext>
-                  </a:extLst>
-                </a:gridCol>
-                <a:gridCol w="467061">
-                  <a:extLst>
-                    <a:ext uri="{9D8B030D-6E8A-4147-A177-3AD203B41FA5}">
-                      <a16:colId xmlns:a16="http://schemas.microsoft.com/office/drawing/2014/main" val="414444322"/>
-                    </a:ext>
-                  </a:extLst>
-                </a:gridCol>
-              </a:tblGrid>
-              <a:tr h="369332">
-                <a:tc>
-                  <a:txBody>
-                    <a:bodyPr/>
-                    <a:lstStyle/>
-                    <a:p>
-                      <a:r>
-                        <a:rPr lang="en-US">
-                          <a:solidFill>
-                            <a:schemeClr val="bg1"/>
-                          </a:solidFill>
-                        </a:rPr>
-                        <a:t>13</a:t>
-                      </a:r>
-                      <a:endParaRPr lang="tr-TR">
-                        <a:solidFill>
-                          <a:schemeClr val="bg1"/>
-                        </a:solidFill>
-                      </a:endParaRPr>
-                    </a:p>
-                  </a:txBody>
-                  <a:tcPr>
-                    <a:lnL w="12700" cap="flat" cmpd="sng" algn="ctr">
-                      <a:solidFill>
-                        <a:schemeClr val="tx1"/>
-                      </a:solidFill>
-                      <a:prstDash val="solid"/>
-                      <a:round/>
-                      <a:headEnd type="none" w="med" len="med"/>
-                      <a:tailEnd type="none" w="med" len="med"/>
-                    </a:lnL>
-                    <a:lnR w="12700" cap="flat" cmpd="sng" algn="ctr">
-                      <a:solidFill>
-                        <a:schemeClr val="tx1"/>
-                      </a:solidFill>
-                      <a:prstDash val="solid"/>
-                      <a:round/>
-                      <a:headEnd type="none" w="med" len="med"/>
-                      <a:tailEnd type="none" w="med" len="med"/>
-                    </a:lnR>
-                    <a:lnT w="12700" cap="flat" cmpd="sng" algn="ctr">
-                      <a:solidFill>
-                        <a:schemeClr val="tx1"/>
-                      </a:solidFill>
-                      <a:prstDash val="solid"/>
-                      <a:round/>
-                      <a:headEnd type="none" w="med" len="med"/>
-                      <a:tailEnd type="none" w="med" len="med"/>
-                    </a:lnT>
-                    <a:lnB w="12700" cap="flat" cmpd="sng" algn="ctr">
-                      <a:solidFill>
-                        <a:schemeClr val="tx1"/>
-                      </a:solidFill>
-                      <a:prstDash val="solid"/>
-                      <a:round/>
-                      <a:headEnd type="none" w="med" len="med"/>
-                      <a:tailEnd type="none" w="med" len="med"/>
-                    </a:lnB>
-                  </a:tcPr>
-                </a:tc>
-                <a:tc>
-                  <a:txBody>
-                    <a:bodyPr/>
-                    <a:lstStyle/>
-                    <a:p>
-                      <a:r>
-                        <a:rPr lang="en-US">
-                          <a:solidFill>
-                            <a:schemeClr val="bg1"/>
-                          </a:solidFill>
-                        </a:rPr>
-                        <a:t>13</a:t>
-                      </a:r>
-                      <a:endParaRPr lang="tr-TR">
-                        <a:solidFill>
-                          <a:schemeClr val="bg1"/>
-                        </a:solidFill>
-                      </a:endParaRPr>
-                    </a:p>
-                  </a:txBody>
-                  <a:tcPr>
-                    <a:lnL w="12700" cap="flat" cmpd="sng" algn="ctr">
-                      <a:solidFill>
-                        <a:schemeClr val="tx1"/>
-                      </a:solidFill>
-                      <a:prstDash val="solid"/>
-                      <a:round/>
-                      <a:headEnd type="none" w="med" len="med"/>
-                      <a:tailEnd type="none" w="med" len="med"/>
-                    </a:lnL>
-                    <a:lnR w="12700" cap="flat" cmpd="sng" algn="ctr">
-                      <a:solidFill>
-                        <a:schemeClr val="tx1"/>
-                      </a:solidFill>
-                      <a:prstDash val="solid"/>
-                      <a:round/>
-                      <a:headEnd type="none" w="med" len="med"/>
-                      <a:tailEnd type="none" w="med" len="med"/>
-                    </a:lnR>
-                    <a:lnT w="12700" cap="flat" cmpd="sng" algn="ctr">
-                      <a:solidFill>
-                        <a:schemeClr val="tx1"/>
-                      </a:solidFill>
-                      <a:prstDash val="solid"/>
-                      <a:round/>
-                      <a:headEnd type="none" w="med" len="med"/>
-                      <a:tailEnd type="none" w="med" len="med"/>
-                    </a:lnT>
-                    <a:lnB w="12700" cap="flat" cmpd="sng" algn="ctr">
-                      <a:solidFill>
-                        <a:schemeClr val="tx1"/>
-                      </a:solidFill>
-                      <a:prstDash val="solid"/>
-                      <a:round/>
-                      <a:headEnd type="none" w="med" len="med"/>
-                      <a:tailEnd type="none" w="med" len="med"/>
-                    </a:lnB>
-                  </a:tcPr>
-                </a:tc>
-                <a:extLst>
-                  <a:ext uri="{0D108BD9-81ED-4DB2-BD59-A6C34878D82A}">
-                    <a16:rowId xmlns:a16="http://schemas.microsoft.com/office/drawing/2014/main" val="3293188918"/>
-                  </a:ext>
-                </a:extLst>
-              </a:tr>
-            </a:tbl>
-          </a:graphicData>
-        </a:graphic>
-      </p:graphicFrame>
-      <p:graphicFrame>
-        <p:nvGraphicFramePr>
-          <p:cNvPr id="34" name="Tablo 33">
-            <a:extLst>
-              <a:ext uri="{FF2B5EF4-FFF2-40B4-BE49-F238E27FC236}">
-                <a16:creationId xmlns:a16="http://schemas.microsoft.com/office/drawing/2014/main" id="{4657B3BA-C7AC-93A2-504C-78B89157D133}"/>
-              </a:ext>
-            </a:extLst>
-          </p:cNvPr>
-          <p:cNvGraphicFramePr>
-            <a:graphicFrameLocks noGrp="1"/>
-          </p:cNvGraphicFramePr>
-          <p:nvPr>
-            <p:extLst>
-              <p:ext uri="{D42A27DB-BD31-4B8C-83A1-F6EECF244321}">
-                <p14:modId xmlns:p14="http://schemas.microsoft.com/office/powerpoint/2010/main" val="1127625104"/>
-              </p:ext>
-            </p:extLst>
-          </p:nvPr>
-        </p:nvGraphicFramePr>
-        <p:xfrm>
-          <a:off x="4643818" y="3506223"/>
-          <a:ext cx="934122" cy="369332"/>
-        </p:xfrm>
-        <a:graphic>
-          <a:graphicData uri="http://schemas.openxmlformats.org/drawingml/2006/table">
-            <a:tbl>
-              <a:tblPr firstRow="1" bandRow="1">
-                <a:tableStyleId>{2D5ABB26-0587-4C30-8999-92F81FD0307C}</a:tableStyleId>
-              </a:tblPr>
-              <a:tblGrid>
-                <a:gridCol w="467061">
-                  <a:extLst>
-                    <a:ext uri="{9D8B030D-6E8A-4147-A177-3AD203B41FA5}">
-                      <a16:colId xmlns:a16="http://schemas.microsoft.com/office/drawing/2014/main" val="3392497328"/>
-                    </a:ext>
-                  </a:extLst>
-                </a:gridCol>
-                <a:gridCol w="467061">
-                  <a:extLst>
-                    <a:ext uri="{9D8B030D-6E8A-4147-A177-3AD203B41FA5}">
-                      <a16:colId xmlns:a16="http://schemas.microsoft.com/office/drawing/2014/main" val="414444322"/>
-                    </a:ext>
-                  </a:extLst>
-                </a:gridCol>
-              </a:tblGrid>
-              <a:tr h="369332">
-                <a:tc>
-                  <a:txBody>
-                    <a:bodyPr/>
-                    <a:lstStyle/>
-                    <a:p>
-                      <a:r>
-                        <a:rPr lang="en-US">
-                          <a:solidFill>
-                            <a:schemeClr val="bg1"/>
-                          </a:solidFill>
-                        </a:rPr>
-                        <a:t>25</a:t>
-                      </a:r>
-                      <a:endParaRPr lang="tr-TR">
-                        <a:solidFill>
-                          <a:schemeClr val="bg1"/>
-                        </a:solidFill>
-                      </a:endParaRPr>
-                    </a:p>
-                  </a:txBody>
-                  <a:tcPr>
-                    <a:lnL w="12700" cap="flat" cmpd="sng" algn="ctr">
-                      <a:solidFill>
-                        <a:schemeClr val="tx1"/>
-                      </a:solidFill>
-                      <a:prstDash val="solid"/>
-                      <a:round/>
-                      <a:headEnd type="none" w="med" len="med"/>
-                      <a:tailEnd type="none" w="med" len="med"/>
-                    </a:lnL>
-                    <a:lnR w="12700" cap="flat" cmpd="sng" algn="ctr">
-                      <a:solidFill>
-                        <a:schemeClr val="tx1"/>
-                      </a:solidFill>
-                      <a:prstDash val="solid"/>
-                      <a:round/>
-                      <a:headEnd type="none" w="med" len="med"/>
-                      <a:tailEnd type="none" w="med" len="med"/>
-                    </a:lnR>
-                    <a:lnT w="12700" cap="flat" cmpd="sng" algn="ctr">
-                      <a:solidFill>
-                        <a:schemeClr val="tx1"/>
-                      </a:solidFill>
-                      <a:prstDash val="solid"/>
-                      <a:round/>
-                      <a:headEnd type="none" w="med" len="med"/>
-                      <a:tailEnd type="none" w="med" len="med"/>
-                    </a:lnT>
-                    <a:lnB w="12700" cap="flat" cmpd="sng" algn="ctr">
-                      <a:solidFill>
-                        <a:schemeClr val="tx1"/>
-                      </a:solidFill>
-                      <a:prstDash val="solid"/>
-                      <a:round/>
-                      <a:headEnd type="none" w="med" len="med"/>
-                      <a:tailEnd type="none" w="med" len="med"/>
-                    </a:lnB>
-                  </a:tcPr>
-                </a:tc>
-                <a:tc>
-                  <a:txBody>
-                    <a:bodyPr/>
-                    <a:lstStyle/>
-                    <a:p>
-                      <a:r>
-                        <a:rPr lang="en-US">
-                          <a:solidFill>
-                            <a:schemeClr val="bg1"/>
-                          </a:solidFill>
-                        </a:rPr>
-                        <a:t>25</a:t>
-                      </a:r>
-                      <a:endParaRPr lang="tr-TR">
-                        <a:solidFill>
-                          <a:schemeClr val="bg1"/>
-                        </a:solidFill>
-                      </a:endParaRPr>
-                    </a:p>
-                  </a:txBody>
-                  <a:tcPr>
-                    <a:lnL w="12700" cap="flat" cmpd="sng" algn="ctr">
-                      <a:solidFill>
-                        <a:schemeClr val="tx1"/>
-                      </a:solidFill>
-                      <a:prstDash val="solid"/>
-                      <a:round/>
-                      <a:headEnd type="none" w="med" len="med"/>
-                      <a:tailEnd type="none" w="med" len="med"/>
-                    </a:lnL>
-                    <a:lnR w="12700" cap="flat" cmpd="sng" algn="ctr">
-                      <a:solidFill>
-                        <a:schemeClr val="tx1"/>
-                      </a:solidFill>
-                      <a:prstDash val="solid"/>
-                      <a:round/>
-                      <a:headEnd type="none" w="med" len="med"/>
-                      <a:tailEnd type="none" w="med" len="med"/>
-                    </a:lnR>
-                    <a:lnT w="12700" cap="flat" cmpd="sng" algn="ctr">
-                      <a:solidFill>
-                        <a:schemeClr val="tx1"/>
-                      </a:solidFill>
-                      <a:prstDash val="solid"/>
-                      <a:round/>
-                      <a:headEnd type="none" w="med" len="med"/>
-                      <a:tailEnd type="none" w="med" len="med"/>
-                    </a:lnT>
-                    <a:lnB w="12700" cap="flat" cmpd="sng" algn="ctr">
-                      <a:solidFill>
-                        <a:schemeClr val="tx1"/>
-                      </a:solidFill>
-                      <a:prstDash val="solid"/>
-                      <a:round/>
-                      <a:headEnd type="none" w="med" len="med"/>
-                      <a:tailEnd type="none" w="med" len="med"/>
-                    </a:lnB>
-                  </a:tcPr>
-                </a:tc>
-                <a:extLst>
-                  <a:ext uri="{0D108BD9-81ED-4DB2-BD59-A6C34878D82A}">
-                    <a16:rowId xmlns:a16="http://schemas.microsoft.com/office/drawing/2014/main" val="3293188918"/>
-                  </a:ext>
-                </a:extLst>
-              </a:tr>
-            </a:tbl>
-          </a:graphicData>
-        </a:graphic>
-      </p:graphicFrame>
-      <p:graphicFrame>
-        <p:nvGraphicFramePr>
-          <p:cNvPr id="35" name="Tablo 34">
-            <a:extLst>
-              <a:ext uri="{FF2B5EF4-FFF2-40B4-BE49-F238E27FC236}">
-                <a16:creationId xmlns:a16="http://schemas.microsoft.com/office/drawing/2014/main" id="{091C5F20-91CF-9D5D-B4F9-30774899A783}"/>
-              </a:ext>
-            </a:extLst>
-          </p:cNvPr>
-          <p:cNvGraphicFramePr>
-            <a:graphicFrameLocks noGrp="1"/>
-          </p:cNvGraphicFramePr>
-          <p:nvPr>
-            <p:extLst>
-              <p:ext uri="{D42A27DB-BD31-4B8C-83A1-F6EECF244321}">
-                <p14:modId xmlns:p14="http://schemas.microsoft.com/office/powerpoint/2010/main" val="672996603"/>
-              </p:ext>
-            </p:extLst>
-          </p:nvPr>
-        </p:nvGraphicFramePr>
-        <p:xfrm>
-          <a:off x="4334237" y="6260862"/>
-          <a:ext cx="934122" cy="369332"/>
-        </p:xfrm>
-        <a:graphic>
-          <a:graphicData uri="http://schemas.openxmlformats.org/drawingml/2006/table">
-            <a:tbl>
-              <a:tblPr firstRow="1" bandRow="1">
-                <a:tableStyleId>{2D5ABB26-0587-4C30-8999-92F81FD0307C}</a:tableStyleId>
-              </a:tblPr>
-              <a:tblGrid>
-                <a:gridCol w="467061">
-                  <a:extLst>
-                    <a:ext uri="{9D8B030D-6E8A-4147-A177-3AD203B41FA5}">
-                      <a16:colId xmlns:a16="http://schemas.microsoft.com/office/drawing/2014/main" val="3392497328"/>
-                    </a:ext>
-                  </a:extLst>
-                </a:gridCol>
-                <a:gridCol w="467061">
-                  <a:extLst>
-                    <a:ext uri="{9D8B030D-6E8A-4147-A177-3AD203B41FA5}">
-                      <a16:colId xmlns:a16="http://schemas.microsoft.com/office/drawing/2014/main" val="414444322"/>
-                    </a:ext>
-                  </a:extLst>
-                </a:gridCol>
-              </a:tblGrid>
-              <a:tr h="369332">
-                <a:tc>
-                  <a:txBody>
-                    <a:bodyPr/>
-                    <a:lstStyle/>
-                    <a:p>
-                      <a:r>
-                        <a:rPr lang="en-US">
-                          <a:solidFill>
-                            <a:schemeClr val="bg1"/>
-                          </a:solidFill>
-                        </a:rPr>
-                        <a:t>38</a:t>
-                      </a:r>
-                      <a:endParaRPr lang="tr-TR">
-                        <a:solidFill>
-                          <a:schemeClr val="bg1"/>
-                        </a:solidFill>
-                      </a:endParaRPr>
-                    </a:p>
-                  </a:txBody>
-                  <a:tcPr>
-                    <a:lnL w="12700" cap="flat" cmpd="sng" algn="ctr">
-                      <a:solidFill>
-                        <a:schemeClr val="tx1"/>
-                      </a:solidFill>
-                      <a:prstDash val="solid"/>
-                      <a:round/>
-                      <a:headEnd type="none" w="med" len="med"/>
-                      <a:tailEnd type="none" w="med" len="med"/>
-                    </a:lnL>
-                    <a:lnR w="12700" cap="flat" cmpd="sng" algn="ctr">
-                      <a:solidFill>
-                        <a:schemeClr val="tx1"/>
-                      </a:solidFill>
-                      <a:prstDash val="solid"/>
-                      <a:round/>
-                      <a:headEnd type="none" w="med" len="med"/>
-                      <a:tailEnd type="none" w="med" len="med"/>
-                    </a:lnR>
-                    <a:lnT w="12700" cap="flat" cmpd="sng" algn="ctr">
-                      <a:solidFill>
-                        <a:schemeClr val="tx1"/>
-                      </a:solidFill>
-                      <a:prstDash val="solid"/>
-                      <a:round/>
-                      <a:headEnd type="none" w="med" len="med"/>
-                      <a:tailEnd type="none" w="med" len="med"/>
-                    </a:lnT>
-                    <a:lnB w="12700" cap="flat" cmpd="sng" algn="ctr">
-                      <a:solidFill>
-                        <a:schemeClr val="tx1"/>
-                      </a:solidFill>
-                      <a:prstDash val="solid"/>
-                      <a:round/>
-                      <a:headEnd type="none" w="med" len="med"/>
-                      <a:tailEnd type="none" w="med" len="med"/>
-                    </a:lnB>
-                  </a:tcPr>
-                </a:tc>
-                <a:tc>
-                  <a:txBody>
-                    <a:bodyPr/>
-                    <a:lstStyle/>
-                    <a:p>
-                      <a:r>
-                        <a:rPr lang="en-US">
-                          <a:solidFill>
-                            <a:schemeClr val="bg1"/>
-                          </a:solidFill>
-                        </a:rPr>
-                        <a:t>38</a:t>
-                      </a:r>
-                      <a:endParaRPr lang="tr-TR">
-                        <a:solidFill>
-                          <a:schemeClr val="bg1"/>
-                        </a:solidFill>
-                      </a:endParaRPr>
-                    </a:p>
-                  </a:txBody>
-                  <a:tcPr>
-                    <a:lnL w="12700" cap="flat" cmpd="sng" algn="ctr">
-                      <a:solidFill>
-                        <a:schemeClr val="tx1"/>
-                      </a:solidFill>
-                      <a:prstDash val="solid"/>
-                      <a:round/>
-                      <a:headEnd type="none" w="med" len="med"/>
-                      <a:tailEnd type="none" w="med" len="med"/>
-                    </a:lnL>
-                    <a:lnR w="12700" cap="flat" cmpd="sng" algn="ctr">
-                      <a:solidFill>
-                        <a:schemeClr val="tx1"/>
-                      </a:solidFill>
-                      <a:prstDash val="solid"/>
-                      <a:round/>
-                      <a:headEnd type="none" w="med" len="med"/>
-                      <a:tailEnd type="none" w="med" len="med"/>
-                    </a:lnR>
-                    <a:lnT w="12700" cap="flat" cmpd="sng" algn="ctr">
-                      <a:solidFill>
-                        <a:schemeClr val="tx1"/>
-                      </a:solidFill>
-                      <a:prstDash val="solid"/>
-                      <a:round/>
-                      <a:headEnd type="none" w="med" len="med"/>
-                      <a:tailEnd type="none" w="med" len="med"/>
-                    </a:lnT>
-                    <a:lnB w="12700" cap="flat" cmpd="sng" algn="ctr">
-                      <a:solidFill>
-                        <a:schemeClr val="tx1"/>
-                      </a:solidFill>
-                      <a:prstDash val="solid"/>
-                      <a:round/>
-                      <a:headEnd type="none" w="med" len="med"/>
-                      <a:tailEnd type="none" w="med" len="med"/>
-                    </a:lnB>
-                  </a:tcPr>
-                </a:tc>
-                <a:extLst>
-                  <a:ext uri="{0D108BD9-81ED-4DB2-BD59-A6C34878D82A}">
-                    <a16:rowId xmlns:a16="http://schemas.microsoft.com/office/drawing/2014/main" val="3293188918"/>
-                  </a:ext>
-                </a:extLst>
-              </a:tr>
-            </a:tbl>
-          </a:graphicData>
-        </a:graphic>
-      </p:graphicFrame>
-      <p:graphicFrame>
-        <p:nvGraphicFramePr>
-          <p:cNvPr id="36" name="Tablo 35">
-            <a:extLst>
-              <a:ext uri="{FF2B5EF4-FFF2-40B4-BE49-F238E27FC236}">
-                <a16:creationId xmlns:a16="http://schemas.microsoft.com/office/drawing/2014/main" id="{0F2E2784-DE25-AB1C-34EF-F3BE2F0C28BF}"/>
-              </a:ext>
-            </a:extLst>
-          </p:cNvPr>
-          <p:cNvGraphicFramePr>
-            <a:graphicFrameLocks noGrp="1"/>
-          </p:cNvGraphicFramePr>
-          <p:nvPr>
-            <p:extLst>
-              <p:ext uri="{D42A27DB-BD31-4B8C-83A1-F6EECF244321}">
-                <p14:modId xmlns:p14="http://schemas.microsoft.com/office/powerpoint/2010/main" val="3321722483"/>
-              </p:ext>
-            </p:extLst>
-          </p:nvPr>
-        </p:nvGraphicFramePr>
-        <p:xfrm>
-          <a:off x="5726157" y="5205134"/>
-          <a:ext cx="934122" cy="369332"/>
-        </p:xfrm>
-        <a:graphic>
-          <a:graphicData uri="http://schemas.openxmlformats.org/drawingml/2006/table">
-            <a:tbl>
-              <a:tblPr firstRow="1" bandRow="1">
-                <a:tableStyleId>{2D5ABB26-0587-4C30-8999-92F81FD0307C}</a:tableStyleId>
-              </a:tblPr>
-              <a:tblGrid>
-                <a:gridCol w="467061">
-                  <a:extLst>
-                    <a:ext uri="{9D8B030D-6E8A-4147-A177-3AD203B41FA5}">
-                      <a16:colId xmlns:a16="http://schemas.microsoft.com/office/drawing/2014/main" val="3392497328"/>
-                    </a:ext>
-                  </a:extLst>
-                </a:gridCol>
-                <a:gridCol w="467061">
-                  <a:extLst>
-                    <a:ext uri="{9D8B030D-6E8A-4147-A177-3AD203B41FA5}">
-                      <a16:colId xmlns:a16="http://schemas.microsoft.com/office/drawing/2014/main" val="414444322"/>
-                    </a:ext>
-                  </a:extLst>
-                </a:gridCol>
-              </a:tblGrid>
-              <a:tr h="369332">
-                <a:tc>
-                  <a:txBody>
-                    <a:bodyPr/>
-                    <a:lstStyle/>
-                    <a:p>
-                      <a:r>
-                        <a:rPr lang="en-US">
-                          <a:solidFill>
-                            <a:schemeClr val="bg1"/>
-                          </a:solidFill>
-                        </a:rPr>
-                        <a:t>35</a:t>
-                      </a:r>
-                      <a:endParaRPr lang="tr-TR">
-                        <a:solidFill>
-                          <a:schemeClr val="bg1"/>
-                        </a:solidFill>
-                      </a:endParaRPr>
-                    </a:p>
-                  </a:txBody>
-                  <a:tcPr>
-                    <a:lnL w="12700" cap="flat" cmpd="sng" algn="ctr">
-                      <a:solidFill>
-                        <a:schemeClr val="tx1"/>
-                      </a:solidFill>
-                      <a:prstDash val="solid"/>
-                      <a:round/>
-                      <a:headEnd type="none" w="med" len="med"/>
-                      <a:tailEnd type="none" w="med" len="med"/>
-                    </a:lnL>
-                    <a:lnR w="12700" cap="flat" cmpd="sng" algn="ctr">
-                      <a:solidFill>
-                        <a:schemeClr val="tx1"/>
-                      </a:solidFill>
-                      <a:prstDash val="solid"/>
-                      <a:round/>
-                      <a:headEnd type="none" w="med" len="med"/>
-                      <a:tailEnd type="none" w="med" len="med"/>
-                    </a:lnR>
-                    <a:lnT w="12700" cap="flat" cmpd="sng" algn="ctr">
-                      <a:solidFill>
-                        <a:schemeClr val="tx1"/>
-                      </a:solidFill>
-                      <a:prstDash val="solid"/>
-                      <a:round/>
-                      <a:headEnd type="none" w="med" len="med"/>
-                      <a:tailEnd type="none" w="med" len="med"/>
-                    </a:lnT>
-                    <a:lnB w="12700" cap="flat" cmpd="sng" algn="ctr">
-                      <a:solidFill>
-                        <a:schemeClr val="tx1"/>
-                      </a:solidFill>
-                      <a:prstDash val="solid"/>
-                      <a:round/>
-                      <a:headEnd type="none" w="med" len="med"/>
-                      <a:tailEnd type="none" w="med" len="med"/>
-                    </a:lnB>
-                  </a:tcPr>
-                </a:tc>
-                <a:tc>
-                  <a:txBody>
-                    <a:bodyPr/>
-                    <a:lstStyle/>
-                    <a:p>
-                      <a:r>
-                        <a:rPr lang="en-US">
-                          <a:solidFill>
-                            <a:schemeClr val="bg1"/>
-                          </a:solidFill>
-                        </a:rPr>
-                        <a:t>35</a:t>
-                      </a:r>
-                      <a:endParaRPr lang="tr-TR">
-                        <a:solidFill>
-                          <a:schemeClr val="bg1"/>
-                        </a:solidFill>
-                      </a:endParaRPr>
-                    </a:p>
-                  </a:txBody>
-                  <a:tcPr>
-                    <a:lnL w="12700" cap="flat" cmpd="sng" algn="ctr">
-                      <a:solidFill>
-                        <a:schemeClr val="tx1"/>
-                      </a:solidFill>
-                      <a:prstDash val="solid"/>
-                      <a:round/>
-                      <a:headEnd type="none" w="med" len="med"/>
-                      <a:tailEnd type="none" w="med" len="med"/>
-                    </a:lnL>
-                    <a:lnR w="12700" cap="flat" cmpd="sng" algn="ctr">
-                      <a:solidFill>
-                        <a:schemeClr val="tx1"/>
-                      </a:solidFill>
-                      <a:prstDash val="solid"/>
-                      <a:round/>
-                      <a:headEnd type="none" w="med" len="med"/>
-                      <a:tailEnd type="none" w="med" len="med"/>
-                    </a:lnR>
-                    <a:lnT w="12700" cap="flat" cmpd="sng" algn="ctr">
-                      <a:solidFill>
-                        <a:schemeClr val="tx1"/>
-                      </a:solidFill>
-                      <a:prstDash val="solid"/>
-                      <a:round/>
-                      <a:headEnd type="none" w="med" len="med"/>
-                      <a:tailEnd type="none" w="med" len="med"/>
-                    </a:lnT>
-                    <a:lnB w="12700" cap="flat" cmpd="sng" algn="ctr">
-                      <a:solidFill>
-                        <a:schemeClr val="tx1"/>
-                      </a:solidFill>
-                      <a:prstDash val="solid"/>
-                      <a:round/>
-                      <a:headEnd type="none" w="med" len="med"/>
-                      <a:tailEnd type="none" w="med" len="med"/>
-                    </a:lnB>
-                  </a:tcPr>
-                </a:tc>
-                <a:extLst>
-                  <a:ext uri="{0D108BD9-81ED-4DB2-BD59-A6C34878D82A}">
-                    <a16:rowId xmlns:a16="http://schemas.microsoft.com/office/drawing/2014/main" val="3293188918"/>
-                  </a:ext>
-                </a:extLst>
-              </a:tr>
-            </a:tbl>
-          </a:graphicData>
-        </a:graphic>
-      </p:graphicFrame>
-      <p:graphicFrame>
-        <p:nvGraphicFramePr>
-          <p:cNvPr id="37" name="Tablo 36">
-            <a:extLst>
-              <a:ext uri="{FF2B5EF4-FFF2-40B4-BE49-F238E27FC236}">
-                <a16:creationId xmlns:a16="http://schemas.microsoft.com/office/drawing/2014/main" id="{B1526F81-FA29-3D86-583D-F82A07864E80}"/>
-              </a:ext>
-            </a:extLst>
-          </p:cNvPr>
-          <p:cNvGraphicFramePr>
-            <a:graphicFrameLocks noGrp="1"/>
-          </p:cNvGraphicFramePr>
-          <p:nvPr>
-            <p:extLst>
-              <p:ext uri="{D42A27DB-BD31-4B8C-83A1-F6EECF244321}">
-                <p14:modId xmlns:p14="http://schemas.microsoft.com/office/powerpoint/2010/main" val="247068703"/>
-              </p:ext>
-            </p:extLst>
-          </p:nvPr>
-        </p:nvGraphicFramePr>
-        <p:xfrm>
-          <a:off x="7910557" y="3548032"/>
-          <a:ext cx="934122" cy="369332"/>
-        </p:xfrm>
-        <a:graphic>
-          <a:graphicData uri="http://schemas.openxmlformats.org/drawingml/2006/table">
-            <a:tbl>
-              <a:tblPr firstRow="1" bandRow="1">
-                <a:tableStyleId>{2D5ABB26-0587-4C30-8999-92F81FD0307C}</a:tableStyleId>
-              </a:tblPr>
-              <a:tblGrid>
-                <a:gridCol w="467061">
-                  <a:extLst>
-                    <a:ext uri="{9D8B030D-6E8A-4147-A177-3AD203B41FA5}">
-                      <a16:colId xmlns:a16="http://schemas.microsoft.com/office/drawing/2014/main" val="3392497328"/>
-                    </a:ext>
-                  </a:extLst>
-                </a:gridCol>
-                <a:gridCol w="467061">
-                  <a:extLst>
-                    <a:ext uri="{9D8B030D-6E8A-4147-A177-3AD203B41FA5}">
-                      <a16:colId xmlns:a16="http://schemas.microsoft.com/office/drawing/2014/main" val="414444322"/>
-                    </a:ext>
-                  </a:extLst>
-                </a:gridCol>
-              </a:tblGrid>
-              <a:tr h="369332">
-                <a:tc>
-                  <a:txBody>
-                    <a:bodyPr/>
-                    <a:lstStyle/>
-                    <a:p>
-                      <a:r>
-                        <a:rPr lang="en-US">
-                          <a:solidFill>
-                            <a:schemeClr val="bg1"/>
-                          </a:solidFill>
-                        </a:rPr>
-                        <a:t>35</a:t>
-                      </a:r>
-                      <a:endParaRPr lang="tr-TR">
-                        <a:solidFill>
-                          <a:schemeClr val="bg1"/>
-                        </a:solidFill>
-                      </a:endParaRPr>
-                    </a:p>
-                  </a:txBody>
-                  <a:tcPr>
-                    <a:lnL w="12700" cap="flat" cmpd="sng" algn="ctr">
-                      <a:solidFill>
-                        <a:schemeClr val="tx1"/>
-                      </a:solidFill>
-                      <a:prstDash val="solid"/>
-                      <a:round/>
-                      <a:headEnd type="none" w="med" len="med"/>
-                      <a:tailEnd type="none" w="med" len="med"/>
-                    </a:lnL>
-                    <a:lnR w="12700" cap="flat" cmpd="sng" algn="ctr">
-                      <a:solidFill>
-                        <a:schemeClr val="tx1"/>
-                      </a:solidFill>
-                      <a:prstDash val="solid"/>
-                      <a:round/>
-                      <a:headEnd type="none" w="med" len="med"/>
-                      <a:tailEnd type="none" w="med" len="med"/>
-                    </a:lnR>
-                    <a:lnT w="12700" cap="flat" cmpd="sng" algn="ctr">
-                      <a:solidFill>
-                        <a:schemeClr val="tx1"/>
-                      </a:solidFill>
-                      <a:prstDash val="solid"/>
-                      <a:round/>
-                      <a:headEnd type="none" w="med" len="med"/>
-                      <a:tailEnd type="none" w="med" len="med"/>
-                    </a:lnT>
-                    <a:lnB w="12700" cap="flat" cmpd="sng" algn="ctr">
-                      <a:solidFill>
-                        <a:schemeClr val="tx1"/>
-                      </a:solidFill>
-                      <a:prstDash val="solid"/>
-                      <a:round/>
-                      <a:headEnd type="none" w="med" len="med"/>
-                      <a:tailEnd type="none" w="med" len="med"/>
-                    </a:lnB>
-                  </a:tcPr>
-                </a:tc>
-                <a:tc>
-                  <a:txBody>
-                    <a:bodyPr/>
-                    <a:lstStyle/>
-                    <a:p>
-                      <a:r>
-                        <a:rPr lang="en-US">
-                          <a:solidFill>
-                            <a:schemeClr val="bg1"/>
-                          </a:solidFill>
-                        </a:rPr>
-                        <a:t>35</a:t>
-                      </a:r>
-                      <a:endParaRPr lang="tr-TR">
-                        <a:solidFill>
-                          <a:schemeClr val="bg1"/>
-                        </a:solidFill>
-                      </a:endParaRPr>
-                    </a:p>
-                  </a:txBody>
-                  <a:tcPr>
-                    <a:lnL w="12700" cap="flat" cmpd="sng" algn="ctr">
-                      <a:solidFill>
-                        <a:schemeClr val="tx1"/>
-                      </a:solidFill>
-                      <a:prstDash val="solid"/>
-                      <a:round/>
-                      <a:headEnd type="none" w="med" len="med"/>
-                      <a:tailEnd type="none" w="med" len="med"/>
-                    </a:lnL>
-                    <a:lnR w="12700" cap="flat" cmpd="sng" algn="ctr">
-                      <a:solidFill>
-                        <a:schemeClr val="tx1"/>
-                      </a:solidFill>
-                      <a:prstDash val="solid"/>
-                      <a:round/>
-                      <a:headEnd type="none" w="med" len="med"/>
-                      <a:tailEnd type="none" w="med" len="med"/>
-                    </a:lnR>
-                    <a:lnT w="12700" cap="flat" cmpd="sng" algn="ctr">
-                      <a:solidFill>
-                        <a:schemeClr val="tx1"/>
-                      </a:solidFill>
-                      <a:prstDash val="solid"/>
-                      <a:round/>
-                      <a:headEnd type="none" w="med" len="med"/>
-                      <a:tailEnd type="none" w="med" len="med"/>
-                    </a:lnT>
-                    <a:lnB w="12700" cap="flat" cmpd="sng" algn="ctr">
-                      <a:solidFill>
-                        <a:schemeClr val="tx1"/>
-                      </a:solidFill>
-                      <a:prstDash val="solid"/>
-                      <a:round/>
-                      <a:headEnd type="none" w="med" len="med"/>
-                      <a:tailEnd type="none" w="med" len="med"/>
-                    </a:lnB>
-                  </a:tcPr>
-                </a:tc>
-                <a:extLst>
-                  <a:ext uri="{0D108BD9-81ED-4DB2-BD59-A6C34878D82A}">
-                    <a16:rowId xmlns:a16="http://schemas.microsoft.com/office/drawing/2014/main" val="3293188918"/>
-                  </a:ext>
-                </a:extLst>
-              </a:tr>
-            </a:tbl>
-          </a:graphicData>
-        </a:graphic>
-      </p:graphicFrame>
-      <p:graphicFrame>
-        <p:nvGraphicFramePr>
-          <p:cNvPr id="38" name="Tablo 37">
-            <a:extLst>
-              <a:ext uri="{FF2B5EF4-FFF2-40B4-BE49-F238E27FC236}">
-                <a16:creationId xmlns:a16="http://schemas.microsoft.com/office/drawing/2014/main" id="{605F4E45-FE6A-F8AB-0A24-99A77EC7946A}"/>
-              </a:ext>
-            </a:extLst>
-          </p:cNvPr>
-          <p:cNvGraphicFramePr>
-            <a:graphicFrameLocks noGrp="1"/>
-          </p:cNvGraphicFramePr>
-          <p:nvPr>
-            <p:extLst>
-              <p:ext uri="{D42A27DB-BD31-4B8C-83A1-F6EECF244321}">
-                <p14:modId xmlns:p14="http://schemas.microsoft.com/office/powerpoint/2010/main" val="4070185456"/>
-              </p:ext>
-            </p:extLst>
-          </p:nvPr>
-        </p:nvGraphicFramePr>
-        <p:xfrm>
-          <a:off x="9188674" y="4764642"/>
-          <a:ext cx="934122" cy="369332"/>
-        </p:xfrm>
-        <a:graphic>
-          <a:graphicData uri="http://schemas.openxmlformats.org/drawingml/2006/table">
-            <a:tbl>
-              <a:tblPr firstRow="1" bandRow="1">
-                <a:tableStyleId>{2D5ABB26-0587-4C30-8999-92F81FD0307C}</a:tableStyleId>
-              </a:tblPr>
-              <a:tblGrid>
-                <a:gridCol w="467061">
-                  <a:extLst>
-                    <a:ext uri="{9D8B030D-6E8A-4147-A177-3AD203B41FA5}">
-                      <a16:colId xmlns:a16="http://schemas.microsoft.com/office/drawing/2014/main" val="3392497328"/>
-                    </a:ext>
-                  </a:extLst>
-                </a:gridCol>
-                <a:gridCol w="467061">
-                  <a:extLst>
-                    <a:ext uri="{9D8B030D-6E8A-4147-A177-3AD203B41FA5}">
-                      <a16:colId xmlns:a16="http://schemas.microsoft.com/office/drawing/2014/main" val="414444322"/>
-                    </a:ext>
-                  </a:extLst>
-                </a:gridCol>
-              </a:tblGrid>
-              <a:tr h="369332">
-                <a:tc>
-                  <a:txBody>
-                    <a:bodyPr/>
-                    <a:lstStyle/>
-                    <a:p>
-                      <a:r>
-                        <a:rPr lang="en-US">
-                          <a:solidFill>
-                            <a:schemeClr val="bg1"/>
-                          </a:solidFill>
-                        </a:rPr>
-                        <a:t>38</a:t>
-                      </a:r>
-                      <a:endParaRPr lang="tr-TR">
-                        <a:solidFill>
-                          <a:schemeClr val="bg1"/>
-                        </a:solidFill>
-                      </a:endParaRPr>
-                    </a:p>
-                  </a:txBody>
-                  <a:tcPr>
-                    <a:lnL w="12700" cap="flat" cmpd="sng" algn="ctr">
-                      <a:solidFill>
-                        <a:schemeClr val="tx1"/>
-                      </a:solidFill>
-                      <a:prstDash val="solid"/>
-                      <a:round/>
-                      <a:headEnd type="none" w="med" len="med"/>
-                      <a:tailEnd type="none" w="med" len="med"/>
-                    </a:lnL>
-                    <a:lnR w="12700" cap="flat" cmpd="sng" algn="ctr">
-                      <a:solidFill>
-                        <a:schemeClr val="tx1"/>
-                      </a:solidFill>
-                      <a:prstDash val="solid"/>
-                      <a:round/>
-                      <a:headEnd type="none" w="med" len="med"/>
-                      <a:tailEnd type="none" w="med" len="med"/>
-                    </a:lnR>
-                    <a:lnT w="12700" cap="flat" cmpd="sng" algn="ctr">
-                      <a:solidFill>
-                        <a:schemeClr val="tx1"/>
-                      </a:solidFill>
-                      <a:prstDash val="solid"/>
-                      <a:round/>
-                      <a:headEnd type="none" w="med" len="med"/>
-                      <a:tailEnd type="none" w="med" len="med"/>
-                    </a:lnT>
-                    <a:lnB w="12700" cap="flat" cmpd="sng" algn="ctr">
-                      <a:solidFill>
-                        <a:schemeClr val="tx1"/>
-                      </a:solidFill>
-                      <a:prstDash val="solid"/>
-                      <a:round/>
-                      <a:headEnd type="none" w="med" len="med"/>
-                      <a:tailEnd type="none" w="med" len="med"/>
-                    </a:lnB>
-                  </a:tcPr>
-                </a:tc>
-                <a:tc>
-                  <a:txBody>
-                    <a:bodyPr/>
-                    <a:lstStyle/>
-                    <a:p>
-                      <a:r>
-                        <a:rPr lang="en-US">
-                          <a:solidFill>
-                            <a:schemeClr val="bg1"/>
-                          </a:solidFill>
-                        </a:rPr>
-                        <a:t>38</a:t>
-                      </a:r>
-                      <a:endParaRPr lang="tr-TR">
-                        <a:solidFill>
-                          <a:schemeClr val="bg1"/>
-                        </a:solidFill>
-                      </a:endParaRPr>
-                    </a:p>
-                  </a:txBody>
-                  <a:tcPr>
-                    <a:lnL w="12700" cap="flat" cmpd="sng" algn="ctr">
-                      <a:solidFill>
-                        <a:schemeClr val="tx1"/>
-                      </a:solidFill>
-                      <a:prstDash val="solid"/>
-                      <a:round/>
-                      <a:headEnd type="none" w="med" len="med"/>
-                      <a:tailEnd type="none" w="med" len="med"/>
-                    </a:lnL>
-                    <a:lnR w="12700" cap="flat" cmpd="sng" algn="ctr">
-                      <a:solidFill>
-                        <a:schemeClr val="tx1"/>
-                      </a:solidFill>
-                      <a:prstDash val="solid"/>
-                      <a:round/>
-                      <a:headEnd type="none" w="med" len="med"/>
-                      <a:tailEnd type="none" w="med" len="med"/>
-                    </a:lnR>
-                    <a:lnT w="12700" cap="flat" cmpd="sng" algn="ctr">
-                      <a:solidFill>
-                        <a:schemeClr val="tx1"/>
-                      </a:solidFill>
-                      <a:prstDash val="solid"/>
-                      <a:round/>
-                      <a:headEnd type="none" w="med" len="med"/>
-                      <a:tailEnd type="none" w="med" len="med"/>
-                    </a:lnT>
-                    <a:lnB w="12700" cap="flat" cmpd="sng" algn="ctr">
-                      <a:solidFill>
-                        <a:schemeClr val="tx1"/>
-                      </a:solidFill>
-                      <a:prstDash val="solid"/>
-                      <a:round/>
-                      <a:headEnd type="none" w="med" len="med"/>
-                      <a:tailEnd type="none" w="med" len="med"/>
-                    </a:lnB>
-                  </a:tcPr>
-                </a:tc>
-                <a:extLst>
-                  <a:ext uri="{0D108BD9-81ED-4DB2-BD59-A6C34878D82A}">
-                    <a16:rowId xmlns:a16="http://schemas.microsoft.com/office/drawing/2014/main" val="3293188918"/>
-                  </a:ext>
-                </a:extLst>
-              </a:tr>
-            </a:tbl>
-          </a:graphicData>
-        </a:graphic>
-      </p:graphicFrame>
-      <p:sp>
-        <p:nvSpPr>
-          <p:cNvPr id="39" name="Metin kutusu 38">
-            <a:extLst>
-              <a:ext uri="{FF2B5EF4-FFF2-40B4-BE49-F238E27FC236}">
-                <a16:creationId xmlns:a16="http://schemas.microsoft.com/office/drawing/2014/main" id="{C1E40FBB-6AEA-DF9B-ADBA-9B0D11E880B9}"/>
-              </a:ext>
-            </a:extLst>
-          </p:cNvPr>
-          <p:cNvSpPr txBox="1"/>
-          <p:nvPr/>
-        </p:nvSpPr>
-        <p:spPr>
-          <a:xfrm>
-            <a:off x="3424239" y="5110978"/>
-            <a:ext cx="934122" cy="369332"/>
-          </a:xfrm>
-          <a:prstGeom prst="rect">
-            <a:avLst/>
-          </a:prstGeom>
-          <a:noFill/>
-        </p:spPr>
-        <p:txBody>
-          <a:bodyPr wrap="square" rtlCol="0">
-            <a:spAutoFit/>
-          </a:bodyPr>
-          <a:lstStyle/>
-          <a:p>
-            <a:r>
-              <a:rPr lang="en-US">
-                <a:solidFill>
-                  <a:schemeClr val="bg1"/>
-                </a:solidFill>
-              </a:rPr>
-              <a:t>B = 8</a:t>
-            </a:r>
-            <a:endParaRPr lang="tr-TR">
-              <a:solidFill>
-                <a:schemeClr val="bg1"/>
-              </a:solidFill>
-            </a:endParaRPr>
-          </a:p>
-        </p:txBody>
-      </p:sp>
-      <p:sp>
-        <p:nvSpPr>
-          <p:cNvPr id="40" name="Metin kutusu 39">
-            <a:extLst>
-              <a:ext uri="{FF2B5EF4-FFF2-40B4-BE49-F238E27FC236}">
-                <a16:creationId xmlns:a16="http://schemas.microsoft.com/office/drawing/2014/main" id="{1F422D2E-E16D-D2DD-C5D2-6C3B49A3D76B}"/>
-              </a:ext>
-            </a:extLst>
-          </p:cNvPr>
-          <p:cNvSpPr txBox="1"/>
-          <p:nvPr/>
-        </p:nvSpPr>
-        <p:spPr>
-          <a:xfrm>
-            <a:off x="4185322" y="5593587"/>
-            <a:ext cx="1361440" cy="369332"/>
-          </a:xfrm>
-          <a:prstGeom prst="rect">
-            <a:avLst/>
-          </a:prstGeom>
-          <a:noFill/>
-        </p:spPr>
-        <p:txBody>
-          <a:bodyPr wrap="square" rtlCol="0">
-            <a:spAutoFit/>
-          </a:bodyPr>
-          <a:lstStyle/>
-          <a:p>
-            <a:r>
-              <a:rPr lang="en-US">
-                <a:solidFill>
-                  <a:schemeClr val="bg1"/>
-                </a:solidFill>
-              </a:rPr>
-              <a:t>D = 25</a:t>
-            </a:r>
-            <a:endParaRPr lang="tr-TR">
-              <a:solidFill>
-                <a:schemeClr val="bg1"/>
-              </a:solidFill>
-            </a:endParaRPr>
-          </a:p>
-        </p:txBody>
-      </p:sp>
-      <p:sp>
-        <p:nvSpPr>
-          <p:cNvPr id="41" name="Metin kutusu 40">
-            <a:extLst>
-              <a:ext uri="{FF2B5EF4-FFF2-40B4-BE49-F238E27FC236}">
-                <a16:creationId xmlns:a16="http://schemas.microsoft.com/office/drawing/2014/main" id="{99559259-0125-CC1D-5FF6-DFD91EB122EF}"/>
-              </a:ext>
-            </a:extLst>
-          </p:cNvPr>
-          <p:cNvSpPr txBox="1"/>
-          <p:nvPr/>
-        </p:nvSpPr>
-        <p:spPr>
-          <a:xfrm>
-            <a:off x="5182652" y="4626169"/>
-            <a:ext cx="1361440" cy="369332"/>
-          </a:xfrm>
-          <a:prstGeom prst="rect">
-            <a:avLst/>
-          </a:prstGeom>
-          <a:noFill/>
-        </p:spPr>
-        <p:txBody>
-          <a:bodyPr wrap="square" rtlCol="0">
-            <a:spAutoFit/>
-          </a:bodyPr>
-          <a:lstStyle/>
-          <a:p>
-            <a:r>
-              <a:rPr lang="en-US">
-                <a:solidFill>
-                  <a:schemeClr val="bg1"/>
-                </a:solidFill>
-              </a:rPr>
-              <a:t>C = 12</a:t>
-            </a:r>
-            <a:endParaRPr lang="tr-TR">
-              <a:solidFill>
-                <a:schemeClr val="bg1"/>
-              </a:solidFill>
-            </a:endParaRPr>
-          </a:p>
-        </p:txBody>
-      </p:sp>
-      <p:sp>
-        <p:nvSpPr>
-          <p:cNvPr id="42" name="Metin kutusu 41">
-            <a:extLst>
-              <a:ext uri="{FF2B5EF4-FFF2-40B4-BE49-F238E27FC236}">
-                <a16:creationId xmlns:a16="http://schemas.microsoft.com/office/drawing/2014/main" id="{D1CBF583-1644-145D-5020-0209E972558B}"/>
-              </a:ext>
-            </a:extLst>
-          </p:cNvPr>
-          <p:cNvSpPr txBox="1"/>
-          <p:nvPr/>
-        </p:nvSpPr>
-        <p:spPr>
-          <a:xfrm>
-            <a:off x="6193218" y="3534883"/>
-            <a:ext cx="1361440" cy="369332"/>
-          </a:xfrm>
-          <a:prstGeom prst="rect">
-            <a:avLst/>
-          </a:prstGeom>
-          <a:noFill/>
-        </p:spPr>
-        <p:txBody>
-          <a:bodyPr wrap="square" rtlCol="0">
-            <a:spAutoFit/>
-          </a:bodyPr>
-          <a:lstStyle/>
-          <a:p>
-            <a:r>
-              <a:rPr lang="en-US">
-                <a:solidFill>
-                  <a:schemeClr val="bg1"/>
-                </a:solidFill>
-              </a:rPr>
-              <a:t>E = 8</a:t>
-            </a:r>
-            <a:endParaRPr lang="tr-TR">
-              <a:solidFill>
-                <a:schemeClr val="bg1"/>
-              </a:solidFill>
-            </a:endParaRPr>
-          </a:p>
-        </p:txBody>
-      </p:sp>
-      <p:sp>
-        <p:nvSpPr>
-          <p:cNvPr id="43" name="Metin kutusu 42">
-            <a:extLst>
-              <a:ext uri="{FF2B5EF4-FFF2-40B4-BE49-F238E27FC236}">
-                <a16:creationId xmlns:a16="http://schemas.microsoft.com/office/drawing/2014/main" id="{9B3FC707-DACA-1956-9EC1-3F8AFBF3446B}"/>
-              </a:ext>
-            </a:extLst>
-          </p:cNvPr>
-          <p:cNvSpPr txBox="1"/>
-          <p:nvPr/>
-        </p:nvSpPr>
-        <p:spPr>
-          <a:xfrm>
-            <a:off x="8178958" y="4148448"/>
-            <a:ext cx="1361440" cy="369332"/>
-          </a:xfrm>
-          <a:prstGeom prst="rect">
-            <a:avLst/>
-          </a:prstGeom>
-          <a:noFill/>
-        </p:spPr>
-        <p:txBody>
-          <a:bodyPr wrap="square" rtlCol="0">
-            <a:spAutoFit/>
-          </a:bodyPr>
-          <a:lstStyle/>
-          <a:p>
-            <a:r>
-              <a:rPr lang="en-US">
-                <a:solidFill>
-                  <a:schemeClr val="bg1"/>
-                </a:solidFill>
-              </a:rPr>
-              <a:t>G = 3</a:t>
-            </a:r>
-            <a:endParaRPr lang="tr-TR">
-              <a:solidFill>
-                <a:schemeClr val="bg1"/>
-              </a:solidFill>
-            </a:endParaRPr>
-          </a:p>
-        </p:txBody>
-      </p:sp>
-      <mc:AlternateContent xmlns:mc="http://schemas.openxmlformats.org/markup-compatibility/2006">
-        <mc:Choice xmlns:p14="http://schemas.microsoft.com/office/powerpoint/2010/main" Requires="p14">
-          <p:contentPart p14:bwMode="auto" r:id="rId2">
-            <p14:nvContentPartPr>
-              <p14:cNvPr id="47" name="Mürekkep 46">
-                <a:extLst>
-                  <a:ext uri="{FF2B5EF4-FFF2-40B4-BE49-F238E27FC236}">
-                    <a16:creationId xmlns:a16="http://schemas.microsoft.com/office/drawing/2014/main" id="{AB3E8BF9-1642-4B0D-D241-C12663C9BBA2}"/>
-                  </a:ext>
-                </a:extLst>
-              </p14:cNvPr>
-              <p14:cNvContentPartPr/>
-              <p14:nvPr/>
-            </p14:nvContentPartPr>
-            <p14:xfrm>
-              <a:off x="1360178" y="3706040"/>
-              <a:ext cx="7643813" cy="2809875"/>
-            </p14:xfrm>
-          </p:contentPart>
-        </mc:Choice>
-        <mc:Fallback>
-          <p:pic>
-            <p:nvPicPr>
-              <p:cNvPr id="47" name="Mürekkep 46">
-                <a:extLst>
-                  <a:ext uri="{FF2B5EF4-FFF2-40B4-BE49-F238E27FC236}">
-                    <a16:creationId xmlns:a16="http://schemas.microsoft.com/office/drawing/2014/main" id="{AB3E8BF9-1642-4B0D-D241-C12663C9BBA2}"/>
-                  </a:ext>
-                </a:extLst>
-              </p:cNvPr>
-              <p:cNvPicPr/>
-              <p:nvPr/>
-            </p:nvPicPr>
-            <p:blipFill>
-              <a:blip r:embed="rId3"/>
-              <a:stretch>
-                <a:fillRect/>
-              </a:stretch>
-            </p:blipFill>
-            <p:spPr>
-              <a:xfrm>
-                <a:off x="1351179" y="3697041"/>
-                <a:ext cx="7661452" cy="2827513"/>
-              </a:xfrm>
-              <a:prstGeom prst="rect">
-                <a:avLst/>
-              </a:prstGeom>
-            </p:spPr>
-          </p:pic>
-        </mc:Fallback>
-      </mc:AlternateContent>
-    </p:spTree>
-    <p:extLst>
-      <p:ext uri="{BB962C8B-B14F-4D97-AF65-F5344CB8AC3E}">
-        <p14:creationId xmlns:p14="http://schemas.microsoft.com/office/powerpoint/2010/main" val="3441898482"/>
-      </p:ext>
-    </p:extLst>
-  </p:cSld>
-  <p:clrMapOvr>
-    <a:masterClrMapping/>
-  </p:clrMapOvr>
-</p:sld>
-</file>
-
-<file path=ppt/slides/slide9.xml><?xml version="1.0" encoding="utf-8"?>
-<p:sld xmlns:a="http://schemas.openxmlformats.org/drawingml/2006/main" xmlns:r="http://schemas.openxmlformats.org/officeDocument/2006/relationships" xmlns:p="http://schemas.openxmlformats.org/presentationml/2006/main">
-  <p:cSld>
-    <p:spTree>
-      <p:nvGrpSpPr>
-        <p:cNvPr id="1" name=""/>
-        <p:cNvGrpSpPr/>
-        <p:nvPr/>
-      </p:nvGrpSpPr>
-      <p:grpSpPr>
-        <a:xfrm>
-          <a:off x="0" y="0"/>
-          <a:ext cx="0" cy="0"/>
-          <a:chOff x="0" y="0"/>
-          <a:chExt cx="0" cy="0"/>
-        </a:xfrm>
-      </p:grpSpPr>
-      <p:sp>
-        <p:nvSpPr>
-          <p:cNvPr id="2" name="Başlık 1">
-            <a:extLst>
-              <a:ext uri="{FF2B5EF4-FFF2-40B4-BE49-F238E27FC236}">
-                <a16:creationId xmlns:a16="http://schemas.microsoft.com/office/drawing/2014/main" id="{747E3FAA-0AE4-CD68-3EAC-CEEB3B23C671}"/>
-              </a:ext>
-            </a:extLst>
-          </p:cNvPr>
-          <p:cNvSpPr>
-            <a:spLocks noGrp="1"/>
-          </p:cNvSpPr>
-          <p:nvPr>
-            <p:ph type="title"/>
-          </p:nvPr>
-        </p:nvSpPr>
         <p:spPr/>
         <p:txBody>
           <a:bodyPr/>
@@ -25698,6 +22060,366 @@
     <p:extLst>
       <p:ext uri="{BB962C8B-B14F-4D97-AF65-F5344CB8AC3E}">
         <p14:creationId xmlns:p14="http://schemas.microsoft.com/office/powerpoint/2010/main" val="637186933"/>
+      </p:ext>
+    </p:extLst>
+  </p:cSld>
+  <p:clrMapOvr>
+    <a:masterClrMapping/>
+  </p:clrMapOvr>
+</p:sld>
+</file>
+
+<file path=ppt/slides/slide9.xml><?xml version="1.0" encoding="utf-8"?>
+<p:sld xmlns:a="http://schemas.openxmlformats.org/drawingml/2006/main" xmlns:r="http://schemas.openxmlformats.org/officeDocument/2006/relationships" xmlns:p="http://schemas.openxmlformats.org/presentationml/2006/main">
+  <p:cSld>
+    <p:spTree>
+      <p:nvGrpSpPr>
+        <p:cNvPr id="1" name=""/>
+        <p:cNvGrpSpPr/>
+        <p:nvPr/>
+      </p:nvGrpSpPr>
+      <p:grpSpPr>
+        <a:xfrm>
+          <a:off x="0" y="0"/>
+          <a:ext cx="0" cy="0"/>
+          <a:chOff x="0" y="0"/>
+          <a:chExt cx="0" cy="0"/>
+        </a:xfrm>
+      </p:grpSpPr>
+      <p:sp>
+        <p:nvSpPr>
+          <p:cNvPr id="2" name="Başlık 1">
+            <a:extLst>
+              <a:ext uri="{FF2B5EF4-FFF2-40B4-BE49-F238E27FC236}">
+                <a16:creationId xmlns:a16="http://schemas.microsoft.com/office/drawing/2014/main" id="{747E3FAA-0AE4-CD68-3EAC-CEEB3B23C671}"/>
+              </a:ext>
+            </a:extLst>
+          </p:cNvPr>
+          <p:cNvSpPr>
+            <a:spLocks noGrp="1"/>
+          </p:cNvSpPr>
+          <p:nvPr>
+            <p:ph type="title"/>
+          </p:nvPr>
+        </p:nvSpPr>
+        <p:spPr>
+          <a:xfrm>
+            <a:off x="508837" y="-4669"/>
+            <a:ext cx="10771632" cy="1325563"/>
+          </a:xfrm>
+        </p:spPr>
+        <p:txBody>
+          <a:bodyPr/>
+          <a:lstStyle/>
+          <a:p>
+            <a:r>
+              <a:rPr lang="tr-TR"/>
+              <a:t>Yasal fizibilite</a:t>
+            </a:r>
+          </a:p>
+        </p:txBody>
+      </p:sp>
+      <p:pic>
+        <p:nvPicPr>
+          <p:cNvPr id="5" name="İçerik Yer Tutucusu 4">
+            <a:extLst>
+              <a:ext uri="{FF2B5EF4-FFF2-40B4-BE49-F238E27FC236}">
+                <a16:creationId xmlns:a16="http://schemas.microsoft.com/office/drawing/2014/main" id="{979CEBA9-43A8-9C6F-E645-ADF545B1E1B3}"/>
+              </a:ext>
+            </a:extLst>
+          </p:cNvPr>
+          <p:cNvPicPr>
+            <a:picLocks noGrp="1" noChangeAspect="1"/>
+          </p:cNvPicPr>
+          <p:nvPr>
+            <p:ph idx="1"/>
+          </p:nvPr>
+        </p:nvPicPr>
+        <p:blipFill>
+          <a:blip r:embed="rId2"/>
+          <a:stretch>
+            <a:fillRect/>
+          </a:stretch>
+        </p:blipFill>
+        <p:spPr>
+          <a:xfrm>
+            <a:off x="7854952" y="2358540"/>
+            <a:ext cx="2954132" cy="2954132"/>
+          </a:xfrm>
+        </p:spPr>
+      </p:pic>
+      <p:sp>
+        <p:nvSpPr>
+          <p:cNvPr id="7" name="Footer Placeholder 4">
+            <a:extLst>
+              <a:ext uri="{FF2B5EF4-FFF2-40B4-BE49-F238E27FC236}">
+                <a16:creationId xmlns:a16="http://schemas.microsoft.com/office/drawing/2014/main" id="{9216AFD6-ECDE-8EAD-2879-41824BC87E48}"/>
+              </a:ext>
+            </a:extLst>
+          </p:cNvPr>
+          <p:cNvSpPr>
+            <a:spLocks noGrp="1"/>
+          </p:cNvSpPr>
+          <p:nvPr>
+            <p:ph type="ftr" sz="quarter" idx="11"/>
+          </p:nvPr>
+        </p:nvSpPr>
+        <p:spPr>
+          <a:xfrm rot="5400000">
+            <a:off x="9953243" y="1792956"/>
+            <a:ext cx="2788920" cy="365125"/>
+          </a:xfrm>
+        </p:spPr>
+        <p:txBody>
+          <a:bodyPr/>
+          <a:lstStyle/>
+          <a:p>
+            <a:pPr rtl="0">
+              <a:spcAft>
+                <a:spcPts val="600"/>
+              </a:spcAft>
+            </a:pPr>
+            <a:r>
+              <a:rPr lang="tr-TR"/>
+              <a:t>Hilal </a:t>
+            </a:r>
+            <a:r>
+              <a:rPr lang="tr-TR" err="1"/>
+              <a:t>dedek</a:t>
+            </a:r>
+            <a:endParaRPr lang="tr-TR" noProof="0"/>
+          </a:p>
+        </p:txBody>
+      </p:sp>
+      <p:cxnSp>
+        <p:nvCxnSpPr>
+          <p:cNvPr id="8" name="Düz Bağlayıcı 7">
+            <a:extLst>
+              <a:ext uri="{FF2B5EF4-FFF2-40B4-BE49-F238E27FC236}">
+                <a16:creationId xmlns:a16="http://schemas.microsoft.com/office/drawing/2014/main" id="{5CB614C5-2158-8D41-32FA-2562ABC946AA}"/>
+              </a:ext>
+            </a:extLst>
+          </p:cNvPr>
+          <p:cNvCxnSpPr>
+            <a:cxnSpLocks/>
+          </p:cNvCxnSpPr>
+          <p:nvPr/>
+        </p:nvCxnSpPr>
+        <p:spPr>
+          <a:xfrm>
+            <a:off x="11347704" y="3174124"/>
+            <a:ext cx="0" cy="3683876"/>
+          </a:xfrm>
+          <a:prstGeom prst="line">
+            <a:avLst/>
+          </a:prstGeom>
+          <a:ln w="28575">
+            <a:solidFill>
+              <a:schemeClr val="bg1">
+                <a:lumMod val="95000"/>
+              </a:schemeClr>
+            </a:solidFill>
+          </a:ln>
+        </p:spPr>
+        <p:style>
+          <a:lnRef idx="1">
+            <a:schemeClr val="accent1"/>
+          </a:lnRef>
+          <a:fillRef idx="0">
+            <a:schemeClr val="accent1"/>
+          </a:fillRef>
+          <a:effectRef idx="0">
+            <a:schemeClr val="accent1"/>
+          </a:effectRef>
+          <a:fontRef idx="minor">
+            <a:schemeClr val="tx1"/>
+          </a:fontRef>
+        </p:style>
+      </p:cxnSp>
+      <p:sp>
+        <p:nvSpPr>
+          <p:cNvPr id="3" name="Metin kutusu 2">
+            <a:extLst>
+              <a:ext uri="{FF2B5EF4-FFF2-40B4-BE49-F238E27FC236}">
+                <a16:creationId xmlns:a16="http://schemas.microsoft.com/office/drawing/2014/main" id="{B757B7F8-DC2B-49BB-806F-0CB9C56AF2F0}"/>
+              </a:ext>
+            </a:extLst>
+          </p:cNvPr>
+          <p:cNvSpPr txBox="1"/>
+          <p:nvPr/>
+        </p:nvSpPr>
+        <p:spPr>
+          <a:xfrm>
+            <a:off x="234046" y="1134725"/>
+            <a:ext cx="7279325" cy="5570756"/>
+          </a:xfrm>
+          <a:prstGeom prst="rect">
+            <a:avLst/>
+          </a:prstGeom>
+          <a:noFill/>
+        </p:spPr>
+        <p:txBody>
+          <a:bodyPr wrap="square" lIns="91440" tIns="45720" rIns="91440" bIns="45720" rtlCol="0" anchor="t">
+            <a:spAutoFit/>
+          </a:bodyPr>
+          <a:lstStyle/>
+          <a:p>
+            <a:pPr marL="342900" indent="-342900">
+              <a:buFont typeface="Arial"/>
+              <a:buChar char="•"/>
+            </a:pPr>
+            <a:r>
+              <a:rPr lang="tr-TR" sz="2200" i="0" u="none" strike="noStrike">
+                <a:solidFill>
+                  <a:schemeClr val="bg1"/>
+                </a:solidFill>
+                <a:effectLst/>
+                <a:latin typeface="univers"/>
+              </a:rPr>
+              <a:t>6698-Kişisel Verilerin Korunması Kanunu</a:t>
+            </a:r>
+            <a:endParaRPr lang="tr-TR" sz="2200" i="0" u="none" strike="noStrike">
+              <a:solidFill>
+                <a:schemeClr val="bg1"/>
+              </a:solidFill>
+              <a:latin typeface="univers"/>
+            </a:endParaRPr>
+          </a:p>
+          <a:p>
+            <a:pPr marL="342900" indent="-342900">
+              <a:buFont typeface="Arial"/>
+              <a:buChar char="•"/>
+            </a:pPr>
+            <a:r>
+              <a:rPr lang="tr-TR" sz="2200">
+                <a:solidFill>
+                  <a:schemeClr val="bg1"/>
+                </a:solidFill>
+                <a:latin typeface="univers"/>
+              </a:rPr>
+              <a:t>6502-Tüketicinin</a:t>
+            </a:r>
+            <a:r>
+              <a:rPr lang="tr-TR" sz="2200" b="0" i="0">
+                <a:solidFill>
+                  <a:schemeClr val="bg1"/>
+                </a:solidFill>
+                <a:effectLst/>
+                <a:latin typeface="univers"/>
+              </a:rPr>
+              <a:t> Korunması Kanunu</a:t>
+            </a:r>
+            <a:endParaRPr lang="tr-TR" sz="2200" b="0" i="0">
+              <a:solidFill>
+                <a:schemeClr val="bg1"/>
+              </a:solidFill>
+              <a:latin typeface="univers"/>
+            </a:endParaRPr>
+          </a:p>
+          <a:p>
+            <a:pPr marL="342900" indent="-342900">
+              <a:buFont typeface="Arial"/>
+              <a:buChar char="•"/>
+            </a:pPr>
+            <a:r>
+              <a:rPr lang="tr-TR" sz="2200">
+                <a:solidFill>
+                  <a:schemeClr val="bg1"/>
+                </a:solidFill>
+                <a:latin typeface="univers"/>
+              </a:rPr>
+              <a:t>5746/2-Araştırma,Geliştirme ve Tasarım Faaliyetlerinin Desteklenmesi Kanunu</a:t>
+            </a:r>
+          </a:p>
+          <a:p>
+            <a:pPr marL="342900" indent="-342900">
+              <a:buFont typeface="Arial"/>
+              <a:buChar char="•"/>
+            </a:pPr>
+            <a:r>
+              <a:rPr lang="tr-TR" sz="2200">
+                <a:solidFill>
+                  <a:schemeClr val="bg1"/>
+                </a:solidFill>
+                <a:latin typeface="univers"/>
+              </a:rPr>
+              <a:t>5651-İnternet Ortamında Yapılan Yayınların Düzenlenmesi Ve Bu Yayınlar Yoluyla İşlenen Suçlarla Mücadele Edilmesi Kanunu</a:t>
+            </a:r>
+          </a:p>
+          <a:p>
+            <a:r>
+              <a:rPr lang="tr-TR" sz="2200" i="0">
+                <a:solidFill>
+                  <a:schemeClr val="bg1"/>
+                </a:solidFill>
+                <a:effectLst/>
+                <a:latin typeface="univers"/>
+              </a:rPr>
+              <a:t>Yukarıdaki </a:t>
+            </a:r>
+            <a:r>
+              <a:rPr lang="tr-TR" sz="2200">
+                <a:solidFill>
+                  <a:schemeClr val="bg1"/>
+                </a:solidFill>
+                <a:latin typeface="univers"/>
+              </a:rPr>
+              <a:t>kanunlarca projenin geliştirilmesinde sıkıntı çıkaracak herhangi bir durum tespit edilmemiştir.</a:t>
+            </a:r>
+          </a:p>
+          <a:p>
+            <a:r>
+              <a:rPr lang="tr-TR" sz="2200" i="0">
+                <a:solidFill>
+                  <a:schemeClr val="bg1"/>
+                </a:solidFill>
+                <a:effectLst/>
+                <a:latin typeface="univers"/>
+              </a:rPr>
+              <a:t>Sonuç olarak</a:t>
+            </a:r>
+            <a:r>
+              <a:rPr lang="tr-TR" sz="2200">
+                <a:solidFill>
+                  <a:schemeClr val="bg1"/>
+                </a:solidFill>
+                <a:latin typeface="univers"/>
+              </a:rPr>
+              <a:t> bu proje yasal</a:t>
+            </a:r>
+            <a:r>
+              <a:rPr lang="tr-TR" sz="2200" b="0" i="0">
+                <a:solidFill>
+                  <a:schemeClr val="bg1"/>
+                </a:solidFill>
+                <a:effectLst/>
+                <a:latin typeface="univers"/>
+              </a:rPr>
+              <a:t> düzenlemelere, yönetmeliklere, yerel ve ulusal yasalara uygundur. Projemiz için gerekli olan izinler, sözleşmeler ve diğer yasal belgelerin elde edilmesinde hiçbir sıkıntı çıkmamıştır.</a:t>
+            </a:r>
+            <a:endParaRPr lang="tr-TR" sz="2200" b="0" i="0">
+              <a:solidFill>
+                <a:schemeClr val="bg1"/>
+              </a:solidFill>
+              <a:latin typeface="univers"/>
+            </a:endParaRPr>
+          </a:p>
+          <a:p>
+            <a:endParaRPr lang="tr-TR" sz="2200" i="0">
+              <a:solidFill>
+                <a:schemeClr val="bg1">
+                  <a:lumMod val="95000"/>
+                </a:schemeClr>
+              </a:solidFill>
+              <a:effectLst/>
+            </a:endParaRPr>
+          </a:p>
+        </p:txBody>
+      </p:sp>
+    </p:spTree>
+    <p:extLst>
+      <p:ext uri="{BB962C8B-B14F-4D97-AF65-F5344CB8AC3E}">
+        <p14:creationId xmlns:p14="http://schemas.microsoft.com/office/powerpoint/2010/main" val="1263121598"/>
       </p:ext>
     </p:extLst>
   </p:cSld>
@@ -26499,15 +23221,6 @@
 </file>
 
 <file path=customXml/item1.xml><?xml version="1.0" encoding="utf-8"?>
-<?mso-contentType ?>
-<FormTemplates xmlns="http://schemas.microsoft.com/sharepoint/v3/contenttype/forms">
-  <Display>DocumentLibraryForm</Display>
-  <Edit>DocumentLibraryForm</Edit>
-  <New>DocumentLibraryForm</New>
-</FormTemplates>
-</file>
-
-<file path=customXml/item2.xml><?xml version="1.0" encoding="utf-8"?>
 <ct:contentTypeSchema xmlns:ct="http://schemas.microsoft.com/office/2006/metadata/contentType" xmlns:ma="http://schemas.microsoft.com/office/2006/metadata/properties/metaAttributes" ct:_="" ma:_="" ma:contentTypeName="Document" ma:contentTypeID="0x01010079F111ED35F8CC479449609E8A0923A6" ma:contentTypeVersion="12" ma:contentTypeDescription="Create a new document." ma:contentTypeScope="" ma:versionID="426e97fa315356fffbdcd9876fe988c2">
   <xsd:schema xmlns:xsd="http://www.w3.org/2001/XMLSchema" xmlns:xs="http://www.w3.org/2001/XMLSchema" xmlns:p="http://schemas.microsoft.com/office/2006/metadata/properties" xmlns:ns2="71af3243-3dd4-4a8d-8c0d-dd76da1f02a5" xmlns:ns3="16c05727-aa75-4e4a-9b5f-8a80a1165891" targetNamespace="http://schemas.microsoft.com/office/2006/metadata/properties" ma:root="true" ma:fieldsID="14b8f0def80e6d70ce3def20c90759ae" ns2:_="" ns3:_="">
     <xsd:import namespace="71af3243-3dd4-4a8d-8c0d-dd76da1f02a5"/>
@@ -26728,6 +23441,15 @@
 </ct:contentTypeSchema>
 </file>
 
+<file path=customXml/item2.xml><?xml version="1.0" encoding="utf-8"?>
+<?mso-contentType ?>
+<FormTemplates xmlns="http://schemas.microsoft.com/sharepoint/v3/contenttype/forms">
+  <Display>DocumentLibraryForm</Display>
+  <Edit>DocumentLibraryForm</Edit>
+  <New>DocumentLibraryForm</New>
+</FormTemplates>
+</file>
+
 <file path=customXml/item3.xml><?xml version="1.0" encoding="utf-8"?>
 <p:properties xmlns:p="http://schemas.microsoft.com/office/2006/metadata/properties" xmlns:xsi="http://www.w3.org/2001/XMLSchema-instance" xmlns:pc="http://schemas.microsoft.com/office/infopath/2007/PartnerControls">
   <documentManagement>
@@ -26738,14 +23460,6 @@
 </file>
 
 <file path=customXml/itemProps1.xml><?xml version="1.0" encoding="utf-8"?>
-<ds:datastoreItem xmlns:ds="http://schemas.openxmlformats.org/officeDocument/2006/customXml" ds:itemID="{3C8E00D1-8EA3-4E42-801D-0253E1EAFC21}">
-  <ds:schemaRefs>
-    <ds:schemaRef ds:uri="http://schemas.microsoft.com/sharepoint/v3/contenttype/forms"/>
-  </ds:schemaRefs>
-</ds:datastoreItem>
-</file>
-
-<file path=customXml/itemProps2.xml><?xml version="1.0" encoding="utf-8"?>
 <ds:datastoreItem xmlns:ds="http://schemas.openxmlformats.org/officeDocument/2006/customXml" ds:itemID="{ABC329F5-30EE-4BF7-AA2A-B837B51416B4}">
   <ds:schemaRefs>
     <ds:schemaRef ds:uri="16c05727-aa75-4e4a-9b5f-8a80a1165891"/>
@@ -26760,6 +23474,14 @@
     <ds:schemaRef ds:uri="http://schemas.microsoft.com/office/infopath/2007/PartnerControls"/>
     <ds:schemaRef ds:uri="http://schemas.openxmlformats.org/package/2006/metadata/core-properties"/>
     <ds:schemaRef ds:uri="http://www.w3.org/2001/XMLSchema"/>
+  </ds:schemaRefs>
+</ds:datastoreItem>
+</file>
+
+<file path=customXml/itemProps2.xml><?xml version="1.0" encoding="utf-8"?>
+<ds:datastoreItem xmlns:ds="http://schemas.openxmlformats.org/officeDocument/2006/customXml" ds:itemID="{3C8E00D1-8EA3-4E42-801D-0253E1EAFC21}">
+  <ds:schemaRefs>
+    <ds:schemaRef ds:uri="http://schemas.microsoft.com/sharepoint/v3/contenttype/forms"/>
   </ds:schemaRefs>
 </ds:datastoreItem>
 </file>
